--- a/ゲーム科2年/00_前期/ゲーム開発Ⅲ/ゲーム物理学/座学/28_接線速度と接線加速度.pptx
+++ b/ゲーム科2年/00_前期/ゲーム開発Ⅲ/ゲーム物理学/座学/28_接線速度と接線加速度.pptx
@@ -12,8 +12,9 @@
     <p:sldId id="265" r:id="rId6"/>
     <p:sldId id="266" r:id="rId7"/>
     <p:sldId id="267" r:id="rId8"/>
-    <p:sldId id="268" r:id="rId9"/>
-    <p:sldId id="269" r:id="rId10"/>
+    <p:sldId id="270" r:id="rId9"/>
+    <p:sldId id="268" r:id="rId10"/>
+    <p:sldId id="269" r:id="rId11"/>
   </p:sldIdLst>
   <p:sldSz cx="12192000" cy="6858000"/>
   <p:notesSz cx="6858000" cy="9144000"/>
@@ -4674,6 +4675,540 @@
 </p:sld>
 </file>
 
+<file path=ppt/slides/slide10.xml><?xml version="1.0" encoding="utf-8"?>
+<p:sld xmlns:a="http://schemas.openxmlformats.org/drawingml/2006/main" xmlns:r="http://schemas.openxmlformats.org/officeDocument/2006/relationships" xmlns:p="http://schemas.openxmlformats.org/presentationml/2006/main">
+  <p:cSld>
+    <p:spTree>
+      <p:nvGrpSpPr>
+        <p:cNvPr id="1" name=""/>
+        <p:cNvGrpSpPr/>
+        <p:nvPr/>
+      </p:nvGrpSpPr>
+      <p:grpSpPr>
+        <a:xfrm>
+          <a:off x="0" y="0"/>
+          <a:ext cx="0" cy="0"/>
+          <a:chOff x="0" y="0"/>
+          <a:chExt cx="0" cy="0"/>
+        </a:xfrm>
+      </p:grpSpPr>
+      <p:sp>
+        <p:nvSpPr>
+          <p:cNvPr id="4" name="テキスト ボックス 3">
+            <a:extLst>
+              <a:ext uri="{FF2B5EF4-FFF2-40B4-BE49-F238E27FC236}">
+                <a16:creationId xmlns:a16="http://schemas.microsoft.com/office/drawing/2014/main" id="{5A13BF46-B8C5-48AA-8308-C9ECFF431A18}"/>
+              </a:ext>
+            </a:extLst>
+          </p:cNvPr>
+          <p:cNvSpPr txBox="1"/>
+          <p:nvPr/>
+        </p:nvSpPr>
+        <p:spPr>
+          <a:xfrm>
+            <a:off x="567542" y="491954"/>
+            <a:ext cx="3174267" cy="584775"/>
+          </a:xfrm>
+          <a:prstGeom prst="rect">
+            <a:avLst/>
+          </a:prstGeom>
+          <a:noFill/>
+        </p:spPr>
+        <p:txBody>
+          <a:bodyPr wrap="none" rtlCol="0">
+            <a:spAutoFit/>
+          </a:bodyPr>
+          <a:lstStyle/>
+          <a:p>
+            <a:r>
+              <a:rPr lang="ja-JP" altLang="en-US" sz="3200" b="1" u="sng" dirty="0"/>
+              <a:t>接線加速度 補足</a:t>
+            </a:r>
+            <a:endParaRPr kumimoji="1" lang="en-US" altLang="ja-JP" sz="3200" b="1" u="sng" dirty="0"/>
+          </a:p>
+        </p:txBody>
+      </p:sp>
+      <mc:AlternateContent xmlns:mc="http://schemas.openxmlformats.org/markup-compatibility/2006" xmlns:a14="http://schemas.microsoft.com/office/drawing/2010/main">
+        <mc:Choice Requires="a14">
+          <p:sp>
+            <p:nvSpPr>
+              <p:cNvPr id="6" name="テキスト ボックス 5">
+                <a:extLst>
+                  <a:ext uri="{FF2B5EF4-FFF2-40B4-BE49-F238E27FC236}">
+                    <a16:creationId xmlns:a16="http://schemas.microsoft.com/office/drawing/2014/main" id="{55830AD6-028B-4C4E-80BF-B70DFC1C3A46}"/>
+                  </a:ext>
+                </a:extLst>
+              </p:cNvPr>
+              <p:cNvSpPr txBox="1"/>
+              <p:nvPr/>
+            </p:nvSpPr>
+            <p:spPr>
+              <a:xfrm>
+                <a:off x="567542" y="1216429"/>
+                <a:ext cx="10334368" cy="3791744"/>
+              </a:xfrm>
+              <a:prstGeom prst="rect">
+                <a:avLst/>
+              </a:prstGeom>
+              <a:noFill/>
+            </p:spPr>
+            <p:txBody>
+              <a:bodyPr wrap="none" rtlCol="0">
+                <a:spAutoFit/>
+              </a:bodyPr>
+              <a:lstStyle/>
+              <a:p>
+                <a:r>
+                  <a:rPr lang="ja-JP" altLang="en-US" sz="2400" dirty="0"/>
+                  <a:t>■接線加速度の成り立ち</a:t>
+                </a:r>
+                <a:endParaRPr lang="en-US" altLang="ja-JP" sz="2400" dirty="0"/>
+              </a:p>
+              <a:p>
+                <a:r>
+                  <a:rPr lang="ja-JP" altLang="en-US" sz="2400" dirty="0"/>
+                  <a:t>接線速度の定義を時間 </a:t>
+                </a:r>
+                <a14:m>
+                  <m:oMath xmlns:m="http://schemas.openxmlformats.org/officeDocument/2006/math">
+                    <m:r>
+                      <a:rPr lang="en-US" altLang="ja-JP" sz="2400" i="1" dirty="0" smtClean="0">
+                        <a:latin typeface="Cambria Math" panose="02040503050406030204" pitchFamily="18" charset="0"/>
+                      </a:rPr>
+                      <m:t>𝑡</m:t>
+                    </m:r>
+                  </m:oMath>
+                </a14:m>
+                <a:r>
+                  <a:rPr lang="ja-JP" altLang="en-US" sz="2400" dirty="0"/>
+                  <a:t> で割ると、</a:t>
+                </a:r>
+                <a:endParaRPr lang="en-US" altLang="ja-JP" sz="2400" dirty="0"/>
+              </a:p>
+              <a:p>
+                <a14:m>
+                  <m:oMath xmlns:m="http://schemas.openxmlformats.org/officeDocument/2006/math">
+                    <m:f>
+                      <m:fPr>
+                        <m:ctrlPr>
+                          <a:rPr lang="en-US" altLang="ja-JP" sz="2400" b="0" i="1" dirty="0" smtClean="0">
+                            <a:latin typeface="Cambria Math" panose="02040503050406030204" pitchFamily="18" charset="0"/>
+                          </a:rPr>
+                        </m:ctrlPr>
+                      </m:fPr>
+                      <m:num>
+                        <m:r>
+                          <a:rPr lang="en-US" altLang="ja-JP" sz="2400" b="0" i="1" dirty="0" smtClean="0">
+                            <a:latin typeface="Cambria Math" panose="02040503050406030204" pitchFamily="18" charset="0"/>
+                          </a:rPr>
+                          <m:t>𝑣</m:t>
+                        </m:r>
+                        <m:r>
+                          <a:rPr lang="en-US" altLang="ja-JP" sz="2400" b="0" i="1" baseline="-25000" dirty="0" smtClean="0">
+                            <a:latin typeface="Cambria Math" panose="02040503050406030204" pitchFamily="18" charset="0"/>
+                          </a:rPr>
+                          <m:t>𝑡</m:t>
+                        </m:r>
+                      </m:num>
+                      <m:den>
+                        <m:r>
+                          <a:rPr lang="en-US" altLang="ja-JP" sz="2400" b="0" i="1" dirty="0" smtClean="0">
+                            <a:latin typeface="Cambria Math" panose="02040503050406030204" pitchFamily="18" charset="0"/>
+                          </a:rPr>
+                          <m:t>𝑡</m:t>
+                        </m:r>
+                      </m:den>
+                    </m:f>
+                    <m:r>
+                      <a:rPr lang="en-US" altLang="ja-JP" sz="2400" b="0" i="1" dirty="0" smtClean="0">
+                        <a:latin typeface="Cambria Math" panose="02040503050406030204" pitchFamily="18" charset="0"/>
+                      </a:rPr>
+                      <m:t>=</m:t>
+                    </m:r>
+                    <m:r>
+                      <a:rPr lang="en-US" altLang="ja-JP" sz="2400" i="1" dirty="0">
+                        <a:latin typeface="Cambria Math" panose="02040503050406030204" pitchFamily="18" charset="0"/>
+                      </a:rPr>
+                      <m:t>𝑟</m:t>
+                    </m:r>
+                    <m:f>
+                      <m:fPr>
+                        <m:ctrlPr>
+                          <a:rPr lang="en-US" altLang="ja-JP" sz="2400" b="0" i="1" dirty="0" smtClean="0">
+                            <a:latin typeface="Cambria Math" panose="02040503050406030204" pitchFamily="18" charset="0"/>
+                          </a:rPr>
+                        </m:ctrlPr>
+                      </m:fPr>
+                      <m:num>
+                        <m:r>
+                          <m:rPr>
+                            <m:sty m:val="p"/>
+                          </m:rPr>
+                          <a:rPr lang="en-US" altLang="ja-JP" sz="2400" i="1" dirty="0">
+                            <a:latin typeface="Cambria Math" panose="02040503050406030204" pitchFamily="18" charset="0"/>
+                          </a:rPr>
+                          <m:t>ω</m:t>
+                        </m:r>
+                      </m:num>
+                      <m:den>
+                        <m:r>
+                          <a:rPr lang="en-US" altLang="ja-JP" sz="2400" b="0" i="1" dirty="0" smtClean="0">
+                            <a:latin typeface="Cambria Math" panose="02040503050406030204" pitchFamily="18" charset="0"/>
+                          </a:rPr>
+                          <m:t>𝑡</m:t>
+                        </m:r>
+                      </m:den>
+                    </m:f>
+                  </m:oMath>
+                </a14:m>
+                <a:r>
+                  <a:rPr lang="en-US" altLang="ja-JP" sz="2400" dirty="0"/>
+                  <a:t> </a:t>
+                </a:r>
+              </a:p>
+              <a:p>
+                <a:endParaRPr lang="en-US" altLang="ja-JP" sz="2400" dirty="0"/>
+              </a:p>
+              <a:p>
+                <a14:m>
+                  <m:oMath xmlns:m="http://schemas.openxmlformats.org/officeDocument/2006/math">
+                    <m:f>
+                      <m:fPr>
+                        <m:ctrlPr>
+                          <a:rPr lang="en-US" altLang="ja-JP" sz="2400" b="0" i="1" dirty="0" smtClean="0">
+                            <a:latin typeface="Cambria Math" panose="02040503050406030204" pitchFamily="18" charset="0"/>
+                          </a:rPr>
+                        </m:ctrlPr>
+                      </m:fPr>
+                      <m:num>
+                        <m:r>
+                          <a:rPr lang="en-US" altLang="ja-JP" sz="2400" b="0" i="1" dirty="0" smtClean="0">
+                            <a:latin typeface="Cambria Math" panose="02040503050406030204" pitchFamily="18" charset="0"/>
+                          </a:rPr>
+                          <m:t>𝑣</m:t>
+                        </m:r>
+                        <m:r>
+                          <a:rPr lang="en-US" altLang="ja-JP" sz="2400" b="0" i="1" baseline="-25000" dirty="0" smtClean="0">
+                            <a:latin typeface="Cambria Math" panose="02040503050406030204" pitchFamily="18" charset="0"/>
+                          </a:rPr>
+                          <m:t>𝑡</m:t>
+                        </m:r>
+                      </m:num>
+                      <m:den>
+                        <m:r>
+                          <a:rPr lang="en-US" altLang="ja-JP" sz="2400" b="0" i="1" dirty="0" smtClean="0">
+                            <a:latin typeface="Cambria Math" panose="02040503050406030204" pitchFamily="18" charset="0"/>
+                          </a:rPr>
+                          <m:t>𝑡</m:t>
+                        </m:r>
+                      </m:den>
+                    </m:f>
+                  </m:oMath>
+                </a14:m>
+                <a:r>
+                  <a:rPr lang="ja-JP" altLang="en-US" sz="2400" dirty="0"/>
+                  <a:t>は速度を時間で割ったもの、つまり加速度である</a:t>
+                </a:r>
+                <a14:m>
+                  <m:oMath xmlns:m="http://schemas.openxmlformats.org/officeDocument/2006/math">
+                    <m:r>
+                      <a:rPr lang="en-US" altLang="ja-JP" sz="2400" b="0" i="0" dirty="0" smtClean="0">
+                        <a:latin typeface="Cambria Math" panose="02040503050406030204" pitchFamily="18" charset="0"/>
+                      </a:rPr>
+                      <m:t>(</m:t>
+                    </m:r>
+                    <m:f>
+                      <m:fPr>
+                        <m:ctrlPr>
+                          <a:rPr lang="en-US" altLang="ja-JP" sz="2400" i="1" dirty="0">
+                            <a:latin typeface="Cambria Math" panose="02040503050406030204" pitchFamily="18" charset="0"/>
+                          </a:rPr>
+                        </m:ctrlPr>
+                      </m:fPr>
+                      <m:num>
+                        <m:r>
+                          <a:rPr lang="en-US" altLang="ja-JP" sz="2400" i="1" dirty="0">
+                            <a:latin typeface="Cambria Math" panose="02040503050406030204" pitchFamily="18" charset="0"/>
+                          </a:rPr>
+                          <m:t>𝑣</m:t>
+                        </m:r>
+                        <m:r>
+                          <a:rPr lang="en-US" altLang="ja-JP" sz="2400" i="1" baseline="-25000" dirty="0">
+                            <a:latin typeface="Cambria Math" panose="02040503050406030204" pitchFamily="18" charset="0"/>
+                          </a:rPr>
+                          <m:t>𝑡</m:t>
+                        </m:r>
+                      </m:num>
+                      <m:den>
+                        <m:r>
+                          <a:rPr lang="en-US" altLang="ja-JP" sz="2400" i="1" dirty="0">
+                            <a:latin typeface="Cambria Math" panose="02040503050406030204" pitchFamily="18" charset="0"/>
+                          </a:rPr>
+                          <m:t>𝑡</m:t>
+                        </m:r>
+                      </m:den>
+                    </m:f>
+                    <m:r>
+                      <a:rPr lang="en-US" altLang="ja-JP" sz="2400" b="0" i="1" dirty="0" smtClean="0">
+                        <a:latin typeface="Cambria Math" panose="02040503050406030204" pitchFamily="18" charset="0"/>
+                      </a:rPr>
+                      <m:t>=</m:t>
+                    </m:r>
+                    <m:r>
+                      <a:rPr lang="en-US" altLang="ja-JP" sz="2400" b="0" i="1" dirty="0" smtClean="0">
+                        <a:latin typeface="Cambria Math" panose="02040503050406030204" pitchFamily="18" charset="0"/>
+                      </a:rPr>
+                      <m:t>𝑎</m:t>
+                    </m:r>
+                    <m:r>
+                      <a:rPr lang="en-US" altLang="ja-JP" sz="2400" b="0" i="1" dirty="0" smtClean="0">
+                        <a:latin typeface="Cambria Math" panose="02040503050406030204" pitchFamily="18" charset="0"/>
+                      </a:rPr>
+                      <m:t>)</m:t>
+                    </m:r>
+                  </m:oMath>
+                </a14:m>
+                <a:endParaRPr lang="en-US" altLang="ja-JP" sz="2400" dirty="0"/>
+              </a:p>
+              <a:p>
+                <a14:m>
+                  <m:oMath xmlns:m="http://schemas.openxmlformats.org/officeDocument/2006/math">
+                    <m:f>
+                      <m:fPr>
+                        <m:ctrlPr>
+                          <a:rPr lang="en-US" altLang="ja-JP" sz="2400" b="0" i="1" dirty="0" smtClean="0">
+                            <a:latin typeface="Cambria Math" panose="02040503050406030204" pitchFamily="18" charset="0"/>
+                          </a:rPr>
+                        </m:ctrlPr>
+                      </m:fPr>
+                      <m:num>
+                        <m:r>
+                          <m:rPr>
+                            <m:sty m:val="p"/>
+                          </m:rPr>
+                          <a:rPr lang="en-US" altLang="ja-JP" sz="2400" i="1" dirty="0">
+                            <a:latin typeface="Cambria Math" panose="02040503050406030204" pitchFamily="18" charset="0"/>
+                          </a:rPr>
+                          <m:t>ω</m:t>
+                        </m:r>
+                      </m:num>
+                      <m:den>
+                        <m:r>
+                          <a:rPr lang="en-US" altLang="ja-JP" sz="2400" b="0" i="1" dirty="0" smtClean="0">
+                            <a:latin typeface="Cambria Math" panose="02040503050406030204" pitchFamily="18" charset="0"/>
+                          </a:rPr>
+                          <m:t>𝑡</m:t>
+                        </m:r>
+                      </m:den>
+                    </m:f>
+                  </m:oMath>
+                </a14:m>
+                <a:r>
+                  <a:rPr lang="ja-JP" altLang="en-US" sz="2400" dirty="0"/>
+                  <a:t>は角速度を時間で割ったもの、つまり角加速度である</a:t>
+                </a:r>
+                <a14:m>
+                  <m:oMath xmlns:m="http://schemas.openxmlformats.org/officeDocument/2006/math">
+                    <m:r>
+                      <a:rPr lang="en-US" altLang="ja-JP" sz="2400" dirty="0">
+                        <a:latin typeface="Cambria Math" panose="02040503050406030204" pitchFamily="18" charset="0"/>
+                      </a:rPr>
+                      <m:t>(</m:t>
+                    </m:r>
+                    <m:f>
+                      <m:fPr>
+                        <m:ctrlPr>
+                          <a:rPr lang="en-US" altLang="ja-JP" sz="2400" b="0" i="1" dirty="0" smtClean="0">
+                            <a:latin typeface="Cambria Math" panose="02040503050406030204" pitchFamily="18" charset="0"/>
+                          </a:rPr>
+                        </m:ctrlPr>
+                      </m:fPr>
+                      <m:num>
+                        <m:r>
+                          <m:rPr>
+                            <m:sty m:val="p"/>
+                          </m:rPr>
+                          <a:rPr lang="en-US" altLang="ja-JP" sz="2400" i="1" dirty="0" smtClean="0">
+                            <a:latin typeface="Cambria Math" panose="02040503050406030204" pitchFamily="18" charset="0"/>
+                          </a:rPr>
+                          <m:t>ω</m:t>
+                        </m:r>
+                      </m:num>
+                      <m:den>
+                        <m:r>
+                          <a:rPr lang="en-US" altLang="ja-JP" sz="2400" b="0" i="1" dirty="0" smtClean="0">
+                            <a:latin typeface="Cambria Math" panose="02040503050406030204" pitchFamily="18" charset="0"/>
+                          </a:rPr>
+                          <m:t>𝑡</m:t>
+                        </m:r>
+                      </m:den>
+                    </m:f>
+                    <m:r>
+                      <a:rPr lang="en-US" altLang="ja-JP" sz="2400" i="1" dirty="0">
+                        <a:latin typeface="Cambria Math" panose="02040503050406030204" pitchFamily="18" charset="0"/>
+                      </a:rPr>
+                      <m:t>=</m:t>
+                    </m:r>
+                    <m:r>
+                      <m:rPr>
+                        <m:sty m:val="p"/>
+                      </m:rPr>
+                      <a:rPr lang="en-US" altLang="ja-JP" sz="2400" i="1" dirty="0" smtClean="0">
+                        <a:latin typeface="Cambria Math" panose="02040503050406030204" pitchFamily="18" charset="0"/>
+                      </a:rPr>
+                      <m:t>α</m:t>
+                    </m:r>
+                    <m:r>
+                      <a:rPr lang="en-US" altLang="ja-JP" sz="2400" i="1" dirty="0">
+                        <a:latin typeface="Cambria Math" panose="02040503050406030204" pitchFamily="18" charset="0"/>
+                      </a:rPr>
+                      <m:t>)</m:t>
+                    </m:r>
+                  </m:oMath>
+                </a14:m>
+                <a:endParaRPr lang="en-US" altLang="ja-JP" sz="2400" dirty="0"/>
+              </a:p>
+              <a:p>
+                <a:endParaRPr lang="en-US" altLang="ja-JP" sz="2400" dirty="0"/>
+              </a:p>
+              <a:p>
+                <a:r>
+                  <a:rPr lang="ja-JP" altLang="en-US" sz="2400" dirty="0"/>
+                  <a:t>瞬間加速度と同様に、接線上の加速度なので</a:t>
+                </a:r>
+                <a14:m>
+                  <m:oMath xmlns:m="http://schemas.openxmlformats.org/officeDocument/2006/math">
+                    <m:r>
+                      <a:rPr lang="en-US" altLang="ja-JP" sz="2400" i="1" dirty="0" smtClean="0">
+                        <a:latin typeface="Cambria Math" panose="02040503050406030204" pitchFamily="18" charset="0"/>
+                      </a:rPr>
+                      <m:t>𝑡</m:t>
+                    </m:r>
+                  </m:oMath>
+                </a14:m>
+                <a:r>
+                  <a:rPr lang="ja-JP" altLang="en-US" sz="2400" dirty="0"/>
+                  <a:t>は</a:t>
+                </a:r>
+                <a:r>
+                  <a:rPr lang="en-US" altLang="ja-JP" sz="2400" dirty="0"/>
+                  <a:t>0</a:t>
+                </a:r>
+                <a:r>
+                  <a:rPr lang="ja-JP" altLang="en-US" sz="2400" dirty="0"/>
+                  <a:t>に極限に近づけるため、</a:t>
+                </a:r>
+                <a:endParaRPr lang="en-US" altLang="ja-JP" sz="2400" dirty="0"/>
+              </a:p>
+              <a:p>
+                <a14:m>
+                  <m:oMath xmlns:m="http://schemas.openxmlformats.org/officeDocument/2006/math">
+                    <m:r>
+                      <a:rPr lang="en-US" altLang="ja-JP" sz="2400" i="1">
+                        <a:latin typeface="Cambria Math" panose="02040503050406030204" pitchFamily="18" charset="0"/>
+                      </a:rPr>
+                      <m:t>𝑎</m:t>
+                    </m:r>
+                    <m:r>
+                      <a:rPr lang="en-US" altLang="ja-JP" sz="2400" i="1" baseline="-25000">
+                        <a:latin typeface="Cambria Math" panose="02040503050406030204" pitchFamily="18" charset="0"/>
+                      </a:rPr>
+                      <m:t>𝑡</m:t>
+                    </m:r>
+                    <m:r>
+                      <a:rPr lang="en-US" altLang="ja-JP" sz="2400" i="1">
+                        <a:latin typeface="Cambria Math" panose="02040503050406030204" pitchFamily="18" charset="0"/>
+                      </a:rPr>
+                      <m:t>=</m:t>
+                    </m:r>
+                    <m:r>
+                      <m:rPr>
+                        <m:sty m:val="p"/>
+                      </m:rPr>
+                      <a:rPr lang="en-US" altLang="ja-JP" sz="2400" i="1">
+                        <a:latin typeface="Cambria Math" panose="02040503050406030204" pitchFamily="18" charset="0"/>
+                      </a:rPr>
+                      <m:t>α</m:t>
+                    </m:r>
+                    <m:r>
+                      <a:rPr lang="en-US" altLang="ja-JP" sz="2400" i="1">
+                        <a:latin typeface="Cambria Math" panose="02040503050406030204" pitchFamily="18" charset="0"/>
+                      </a:rPr>
+                      <m:t>𝑟</m:t>
+                    </m:r>
+                  </m:oMath>
+                </a14:m>
+                <a:r>
+                  <a:rPr lang="en-US" altLang="ja-JP" sz="2400" dirty="0"/>
+                  <a:t> </a:t>
+                </a:r>
+                <a:r>
+                  <a:rPr lang="ja-JP" altLang="en-US" sz="2400" dirty="0"/>
+                  <a:t>となる</a:t>
+                </a:r>
+                <a:endParaRPr lang="en-US" altLang="ja-JP" sz="2400" dirty="0"/>
+              </a:p>
+            </p:txBody>
+          </p:sp>
+        </mc:Choice>
+        <mc:Fallback xmlns="">
+          <p:sp>
+            <p:nvSpPr>
+              <p:cNvPr id="6" name="テキスト ボックス 5">
+                <a:extLst>
+                  <a:ext uri="{FF2B5EF4-FFF2-40B4-BE49-F238E27FC236}">
+                    <a16:creationId xmlns:a16="http://schemas.microsoft.com/office/drawing/2014/main" id="{55830AD6-028B-4C4E-80BF-B70DFC1C3A46}"/>
+                  </a:ext>
+                </a:extLst>
+              </p:cNvPr>
+              <p:cNvSpPr txBox="1">
+                <a:spLocks noRot="1" noChangeAspect="1" noMove="1" noResize="1" noEditPoints="1" noAdjustHandles="1" noChangeArrowheads="1" noChangeShapeType="1" noTextEdit="1"/>
+              </p:cNvSpPr>
+              <p:nvPr/>
+            </p:nvSpPr>
+            <p:spPr>
+              <a:xfrm>
+                <a:off x="567542" y="1216429"/>
+                <a:ext cx="10334368" cy="3791744"/>
+              </a:xfrm>
+              <a:prstGeom prst="rect">
+                <a:avLst/>
+              </a:prstGeom>
+              <a:blipFill>
+                <a:blip r:embed="rId2"/>
+                <a:stretch>
+                  <a:fillRect l="-885" t="-1286" b="-2733"/>
+                </a:stretch>
+              </a:blipFill>
+            </p:spPr>
+            <p:txBody>
+              <a:bodyPr/>
+              <a:lstStyle/>
+              <a:p>
+                <a:r>
+                  <a:rPr lang="ja-JP" altLang="en-US">
+                    <a:noFill/>
+                  </a:rPr>
+                  <a:t> </a:t>
+                </a:r>
+              </a:p>
+            </p:txBody>
+          </p:sp>
+        </mc:Fallback>
+      </mc:AlternateContent>
+    </p:spTree>
+    <p:extLst>
+      <p:ext uri="{BB962C8B-B14F-4D97-AF65-F5344CB8AC3E}">
+        <p14:creationId xmlns:p14="http://schemas.microsoft.com/office/powerpoint/2010/main" val="3665387649"/>
+      </p:ext>
+    </p:extLst>
+  </p:cSld>
+  <p:clrMapOvr>
+    <a:masterClrMapping/>
+  </p:clrMapOvr>
+</p:sld>
+</file>
+
 <file path=ppt/slides/slide2.xml><?xml version="1.0" encoding="utf-8"?>
 <p:sld xmlns:a="http://schemas.openxmlformats.org/drawingml/2006/main" xmlns:r="http://schemas.openxmlformats.org/officeDocument/2006/relationships" xmlns:p="http://schemas.openxmlformats.org/presentationml/2006/main">
   <p:cSld>
@@ -5856,8 +6391,8 @@
           </a:p>
         </p:txBody>
       </p:sp>
-      <mc:AlternateContent xmlns:mc="http://schemas.openxmlformats.org/markup-compatibility/2006">
-        <mc:Choice xmlns:a14="http://schemas.microsoft.com/office/drawing/2010/main" Requires="a14">
+      <mc:AlternateContent xmlns:mc="http://schemas.openxmlformats.org/markup-compatibility/2006" xmlns:a14="http://schemas.microsoft.com/office/drawing/2010/main">
+        <mc:Choice Requires="a14">
           <p:sp>
             <p:nvSpPr>
               <p:cNvPr id="6" name="テキスト ボックス 5">
@@ -6065,7 +6600,7 @@
             </p:txBody>
           </p:sp>
         </mc:Choice>
-        <mc:Fallback>
+        <mc:Fallback xmlns="">
           <p:sp>
             <p:nvSpPr>
               <p:cNvPr id="6" name="テキスト ボックス 5">
@@ -6176,8 +6711,8 @@
           </a:p>
         </p:txBody>
       </p:sp>
-      <mc:AlternateContent xmlns:mc="http://schemas.openxmlformats.org/markup-compatibility/2006">
-        <mc:Choice xmlns:a14="http://schemas.microsoft.com/office/drawing/2010/main" Requires="a14">
+      <mc:AlternateContent xmlns:mc="http://schemas.openxmlformats.org/markup-compatibility/2006" xmlns:a14="http://schemas.microsoft.com/office/drawing/2010/main">
+        <mc:Choice Requires="a14">
           <p:sp>
             <p:nvSpPr>
               <p:cNvPr id="6" name="テキスト ボックス 5">
@@ -6370,13 +6905,7 @@
                       <a:rPr lang="en-US" altLang="ja-JP" sz="2400" b="0" i="1" smtClean="0">
                         <a:latin typeface="Cambria Math" panose="02040503050406030204" pitchFamily="18" charset="0"/>
                       </a:rPr>
-                      <m:t>=</m:t>
-                    </m:r>
-                    <m:r>
-                      <a:rPr lang="en-US" altLang="ja-JP" sz="2400" b="0" i="1" smtClean="0">
-                        <a:latin typeface="Cambria Math" panose="02040503050406030204" pitchFamily="18" charset="0"/>
-                      </a:rPr>
-                      <m:t>100</m:t>
+                      <m:t>=100</m:t>
                     </m:r>
                     <m:r>
                       <a:rPr lang="en-US" altLang="ja-JP" sz="2400" b="0" i="1" smtClean="0">
@@ -6474,7 +7003,7 @@
             </p:txBody>
           </p:sp>
         </mc:Choice>
-        <mc:Fallback>
+        <mc:Fallback xmlns="">
           <p:sp>
             <p:nvSpPr>
               <p:cNvPr id="6" name="テキスト ボックス 5">
@@ -6639,8 +7168,8 @@
           </a:p>
         </p:txBody>
       </p:sp>
-      <mc:AlternateContent xmlns:mc="http://schemas.openxmlformats.org/markup-compatibility/2006">
-        <mc:Choice xmlns:a14="http://schemas.microsoft.com/office/drawing/2010/main" Requires="a14">
+      <mc:AlternateContent xmlns:mc="http://schemas.openxmlformats.org/markup-compatibility/2006" xmlns:a14="http://schemas.microsoft.com/office/drawing/2010/main">
+        <mc:Choice Requires="a14">
           <p:sp>
             <p:nvSpPr>
               <p:cNvPr id="6" name="テキスト ボックス 5">
@@ -6874,7 +7403,7 @@
             </p:txBody>
           </p:sp>
         </mc:Choice>
-        <mc:Fallback>
+        <mc:Fallback xmlns="">
           <p:sp>
             <p:nvSpPr>
               <p:cNvPr id="6" name="テキスト ボックス 5">
@@ -6985,8 +7514,8 @@
           </a:p>
         </p:txBody>
       </p:sp>
-      <mc:AlternateContent xmlns:mc="http://schemas.openxmlformats.org/markup-compatibility/2006">
-        <mc:Choice xmlns:a14="http://schemas.microsoft.com/office/drawing/2010/main" Requires="a14">
+      <mc:AlternateContent xmlns:mc="http://schemas.openxmlformats.org/markup-compatibility/2006" xmlns:a14="http://schemas.microsoft.com/office/drawing/2010/main">
+        <mc:Choice Requires="a14">
           <p:sp>
             <p:nvSpPr>
               <p:cNvPr id="6" name="テキスト ボックス 5">
@@ -7408,7 +7937,7 @@
             </p:txBody>
           </p:sp>
         </mc:Choice>
-        <mc:Fallback>
+        <mc:Fallback xmlns="">
           <p:sp>
             <p:nvSpPr>
               <p:cNvPr id="6" name="テキスト ボックス 5">
@@ -7519,8 +8048,8 @@
           </a:p>
         </p:txBody>
       </p:sp>
-      <mc:AlternateContent xmlns:mc="http://schemas.openxmlformats.org/markup-compatibility/2006">
-        <mc:Choice xmlns:a14="http://schemas.microsoft.com/office/drawing/2010/main" Requires="a14">
+      <mc:AlternateContent xmlns:mc="http://schemas.openxmlformats.org/markup-compatibility/2006" xmlns:a14="http://schemas.microsoft.com/office/drawing/2010/main">
+        <mc:Choice Requires="a14">
           <p:sp>
             <p:nvSpPr>
               <p:cNvPr id="6" name="テキスト ボックス 5">
@@ -7727,7 +8256,7 @@
             </p:txBody>
           </p:sp>
         </mc:Choice>
-        <mc:Fallback>
+        <mc:Fallback xmlns="">
           <p:sp>
             <p:nvSpPr>
               <p:cNvPr id="6" name="テキスト ボックス 5">
@@ -7838,8 +8367,8 @@
           </a:p>
         </p:txBody>
       </p:sp>
-      <mc:AlternateContent xmlns:mc="http://schemas.openxmlformats.org/markup-compatibility/2006">
-        <mc:Choice xmlns:a14="http://schemas.microsoft.com/office/drawing/2010/main" Requires="a14">
+      <mc:AlternateContent xmlns:mc="http://schemas.openxmlformats.org/markup-compatibility/2006" xmlns:a14="http://schemas.microsoft.com/office/drawing/2010/main">
+        <mc:Choice Requires="a14">
           <p:sp>
             <p:nvSpPr>
               <p:cNvPr id="6" name="テキスト ボックス 5">
@@ -7855,7 +8384,7 @@
             <p:spPr>
               <a:xfrm>
                 <a:off x="567542" y="1216429"/>
-                <a:ext cx="9718814" cy="5362943"/>
+                <a:ext cx="7290970" cy="4033476"/>
               </a:xfrm>
               <a:prstGeom prst="rect">
                 <a:avLst/>
@@ -7870,38 +8399,20 @@
               <a:p>
                 <a:r>
                   <a:rPr lang="ja-JP" altLang="en-US" sz="2400" dirty="0"/>
-                  <a:t>■接線速度の成り立ち</a:t>
+                  <a:t>■なぜラジアンは単位に含まれないの？</a:t>
                 </a:r>
                 <a:endParaRPr lang="en-US" altLang="ja-JP" sz="2400" dirty="0"/>
               </a:p>
               <a:p>
                 <a:r>
                   <a:rPr lang="ja-JP" altLang="en-US" sz="2400" dirty="0"/>
-                  <a:t>変位角の定義を、弧の長さを求める式に変形すると、</a:t>
+                  <a:t>変位角の定義は、</a:t>
                 </a:r>
                 <a:endParaRPr lang="en-US" altLang="ja-JP" sz="2400" dirty="0"/>
               </a:p>
               <a:p>
                 <a14:m>
                   <m:oMath xmlns:m="http://schemas.openxmlformats.org/officeDocument/2006/math">
-                    <m:r>
-                      <a:rPr lang="en-US" altLang="ja-JP" sz="2400" b="0" i="1" dirty="0" smtClean="0">
-                        <a:latin typeface="Cambria Math" panose="02040503050406030204" pitchFamily="18" charset="0"/>
-                      </a:rPr>
-                      <m:t>𝑠</m:t>
-                    </m:r>
-                    <m:r>
-                      <a:rPr lang="en-US" altLang="ja-JP" sz="2400" b="0" i="1" dirty="0" smtClean="0">
-                        <a:latin typeface="Cambria Math" panose="02040503050406030204" pitchFamily="18" charset="0"/>
-                      </a:rPr>
-                      <m:t>=</m:t>
-                    </m:r>
-                    <m:r>
-                      <a:rPr lang="en-US" altLang="ja-JP" sz="2400" b="0" i="1" dirty="0" smtClean="0">
-                        <a:latin typeface="Cambria Math" panose="02040503050406030204" pitchFamily="18" charset="0"/>
-                      </a:rPr>
-                      <m:t>𝑟</m:t>
-                    </m:r>
                     <m:r>
                       <m:rPr>
                         <m:sty m:val="p"/>
@@ -7911,40 +8422,12 @@
                       </a:rPr>
                       <m:t>θ</m:t>
                     </m:r>
-                  </m:oMath>
-                </a14:m>
-                <a:r>
-                  <a:rPr lang="en-US" altLang="ja-JP" sz="2400" dirty="0"/>
-                  <a:t> </a:t>
-                </a:r>
-              </a:p>
-              <a:p>
-                <a:endParaRPr lang="en-US" altLang="ja-JP" sz="2400" dirty="0"/>
-              </a:p>
-              <a:p>
-                <a:r>
-                  <a:rPr lang="ja-JP" altLang="en-US" sz="2400" dirty="0"/>
-                  <a:t>両辺を時間 </a:t>
-                </a:r>
-                <a14:m>
-                  <m:oMath xmlns:m="http://schemas.openxmlformats.org/officeDocument/2006/math">
-                    <m:r>
-                      <a:rPr lang="en-US" altLang="ja-JP" sz="2400" i="1" dirty="0" smtClean="0">
-                        <a:latin typeface="Cambria Math" panose="02040503050406030204" pitchFamily="18" charset="0"/>
-                      </a:rPr>
-                      <m:t>𝑡</m:t>
-                    </m:r>
-                  </m:oMath>
-                </a14:m>
-                <a:r>
-                  <a:rPr lang="ja-JP" altLang="en-US" sz="2400" dirty="0"/>
-                  <a:t> で割ると、</a:t>
-                </a:r>
-                <a:endParaRPr lang="en-US" altLang="ja-JP" sz="2400" dirty="0"/>
-              </a:p>
-              <a:p>
-                <a14:m>
-                  <m:oMath xmlns:m="http://schemas.openxmlformats.org/officeDocument/2006/math">
+                    <m:r>
+                      <a:rPr lang="en-US" altLang="ja-JP" sz="2400" b="0" i="1" dirty="0" smtClean="0">
+                        <a:latin typeface="Cambria Math" panose="02040503050406030204" pitchFamily="18" charset="0"/>
+                      </a:rPr>
+                      <m:t>=</m:t>
+                    </m:r>
                     <m:f>
                       <m:fPr>
                         <m:ctrlPr>
@@ -7966,47 +8449,7 @@
                           <a:rPr lang="en-US" altLang="ja-JP" sz="2400" b="0" i="1" dirty="0" smtClean="0">
                             <a:latin typeface="Cambria Math" panose="02040503050406030204" pitchFamily="18" charset="0"/>
                           </a:rPr>
-                          <m:t>𝑡</m:t>
-                        </m:r>
-                      </m:den>
-                    </m:f>
-                    <m:r>
-                      <a:rPr lang="en-US" altLang="ja-JP" sz="2400" b="0" i="1" dirty="0" smtClean="0">
-                        <a:latin typeface="Cambria Math" panose="02040503050406030204" pitchFamily="18" charset="0"/>
-                      </a:rPr>
-                      <m:t>=</m:t>
-                    </m:r>
-                    <m:r>
-                      <a:rPr lang="en-US" altLang="ja-JP" sz="2400" b="0" i="1" dirty="0" smtClean="0">
-                        <a:latin typeface="Cambria Math" panose="02040503050406030204" pitchFamily="18" charset="0"/>
-                      </a:rPr>
-                      <m:t>𝑟</m:t>
-                    </m:r>
-                    <m:f>
-                      <m:fPr>
-                        <m:ctrlPr>
-                          <a:rPr lang="en-US" altLang="ja-JP" sz="2400" b="0" i="1" dirty="0" smtClean="0">
-                            <a:latin typeface="Cambria Math" panose="02040503050406030204" pitchFamily="18" charset="0"/>
-                          </a:rPr>
-                        </m:ctrlPr>
-                      </m:fPr>
-                      <m:num>
-                        <m:r>
-                          <m:rPr>
-                            <m:sty m:val="p"/>
-                          </m:rPr>
-                          <a:rPr lang="en-US" altLang="ja-JP" sz="2400" i="1" dirty="0">
-                            <a:latin typeface="Cambria Math" panose="02040503050406030204" pitchFamily="18" charset="0"/>
-                          </a:rPr>
-                          <m:t>θ</m:t>
-                        </m:r>
-                      </m:num>
-                      <m:den>
-                        <m:r>
-                          <a:rPr lang="en-US" altLang="ja-JP" sz="2400" b="0" i="1" dirty="0" smtClean="0">
-                            <a:latin typeface="Cambria Math" panose="02040503050406030204" pitchFamily="18" charset="0"/>
-                          </a:rPr>
-                          <m:t>𝑡</m:t>
+                          <m:t>𝑟</m:t>
                         </m:r>
                       </m:den>
                     </m:f>
@@ -8023,6 +8466,76 @@
               <a:p>
                 <a14:m>
                   <m:oMath xmlns:m="http://schemas.openxmlformats.org/officeDocument/2006/math">
+                    <m:r>
+                      <a:rPr lang="en-US" altLang="ja-JP" sz="2400" b="0" i="1" dirty="0" smtClean="0">
+                        <a:latin typeface="Cambria Math" panose="02040503050406030204" pitchFamily="18" charset="0"/>
+                      </a:rPr>
+                      <m:t>𝑠</m:t>
+                    </m:r>
+                  </m:oMath>
+                </a14:m>
+                <a:r>
+                  <a:rPr lang="en-US" altLang="ja-JP" sz="2400" dirty="0"/>
+                  <a:t> </a:t>
+                </a:r>
+                <a:r>
+                  <a:rPr lang="ja-JP" altLang="en-US" sz="2400" dirty="0"/>
+                  <a:t>も </a:t>
+                </a:r>
+                <a14:m>
+                  <m:oMath xmlns:m="http://schemas.openxmlformats.org/officeDocument/2006/math">
+                    <m:r>
+                      <a:rPr lang="en-US" altLang="ja-JP" sz="2400" i="1" dirty="0">
+                        <a:latin typeface="Cambria Math" panose="02040503050406030204" pitchFamily="18" charset="0"/>
+                      </a:rPr>
+                      <m:t>𝑟</m:t>
+                    </m:r>
+                  </m:oMath>
+                </a14:m>
+                <a:r>
+                  <a:rPr lang="en-US" altLang="ja-JP" sz="2400" dirty="0"/>
+                  <a:t> </a:t>
+                </a:r>
+                <a:r>
+                  <a:rPr lang="ja-JP" altLang="en-US" sz="2400" dirty="0"/>
+                  <a:t>も長さなので単位は</a:t>
+                </a:r>
+                <a:r>
+                  <a:rPr lang="en-US" altLang="ja-JP" sz="2400" dirty="0"/>
+                  <a:t>m</a:t>
+                </a:r>
+                <a:r>
+                  <a:rPr lang="ja-JP" altLang="en-US" sz="2400" dirty="0"/>
+                  <a:t>や</a:t>
+                </a:r>
+                <a:r>
+                  <a:rPr lang="en-US" altLang="ja-JP" sz="2400" dirty="0"/>
+                  <a:t>km</a:t>
+                </a:r>
+                <a:r>
+                  <a:rPr lang="ja-JP" altLang="en-US" sz="2400" dirty="0"/>
+                  <a:t>になる。つまり、</a:t>
+                </a:r>
+                <a:endParaRPr lang="en-US" altLang="ja-JP" sz="2400" dirty="0"/>
+              </a:p>
+              <a:p>
+                <a14:m>
+                  <m:oMath xmlns:m="http://schemas.openxmlformats.org/officeDocument/2006/math">
+                    <m:r>
+                      <m:rPr>
+                        <m:sty m:val="p"/>
+                      </m:rPr>
+                      <a:rPr lang="en-US" altLang="ja-JP" sz="2400" i="1" dirty="0" smtClean="0">
+                        <a:latin typeface="Cambria Math" panose="02040503050406030204" pitchFamily="18" charset="0"/>
+                      </a:rPr>
+                      <m:t>θ</m:t>
+                    </m:r>
+                    <m:r>
+                      <a:rPr lang="en-US" altLang="ja-JP" sz="2400" b="0" i="1" dirty="0" smtClean="0">
+                        <a:latin typeface="Cambria Math" panose="02040503050406030204" pitchFamily="18" charset="0"/>
+                      </a:rPr>
+                      <m:t>=</m:t>
+                    </m:r>
                     <m:f>
                       <m:fPr>
                         <m:ctrlPr>
@@ -8036,7 +8549,7 @@
                           <a:rPr lang="en-US" altLang="ja-JP" sz="2400" b="0" i="1" dirty="0" smtClean="0">
                             <a:latin typeface="Cambria Math" panose="02040503050406030204" pitchFamily="18" charset="0"/>
                           </a:rPr>
-                          <m:t>𝑠</m:t>
+                          <m:t>𝑚</m:t>
                         </m:r>
                       </m:num>
                       <m:den>
@@ -8044,268 +8557,70 @@
                           <a:rPr lang="en-US" altLang="ja-JP" sz="2400" b="0" i="1" dirty="0" smtClean="0">
                             <a:latin typeface="Cambria Math" panose="02040503050406030204" pitchFamily="18" charset="0"/>
                           </a:rPr>
-                          <m:t>𝑡</m:t>
+                          <m:t>𝑚</m:t>
                         </m:r>
                       </m:den>
                     </m:f>
+                    <m:r>
+                      <a:rPr lang="en-US" altLang="ja-JP" sz="2400" b="0" i="1" dirty="0" smtClean="0">
+                        <a:latin typeface="Cambria Math" panose="02040503050406030204" pitchFamily="18" charset="0"/>
+                      </a:rPr>
+                      <m:t>=1</m:t>
+                    </m:r>
                   </m:oMath>
                 </a14:m>
                 <a:r>
+                  <a:rPr lang="en-US" altLang="ja-JP" sz="2400" dirty="0"/>
+                  <a:t> </a:t>
+                </a:r>
+                <a:r>
                   <a:rPr lang="ja-JP" altLang="en-US" sz="2400" dirty="0"/>
-                  <a:t> は弧の長さを時間で割ったもの、つまり速度である</a:t>
+                  <a:t>となり単位がなくなる。</a:t>
+                </a:r>
+                <a:endParaRPr lang="en-US" altLang="ja-JP" sz="2400" dirty="0"/>
+              </a:p>
+              <a:p>
+                <a:r>
+                  <a:rPr lang="ja-JP" altLang="en-US" sz="2400" dirty="0"/>
+                  <a:t>よって変位角の単位は無し</a:t>
+                </a:r>
+                <a:endParaRPr lang="en-US" altLang="ja-JP" sz="2400" dirty="0"/>
+              </a:p>
+              <a:p>
+                <a:endParaRPr lang="en-US" altLang="ja-JP" sz="2400" dirty="0"/>
+              </a:p>
+              <a:p>
+                <a:r>
+                  <a:rPr lang="ja-JP" altLang="en-US" sz="2400" dirty="0"/>
+                  <a:t>ここではわかりやすく</a:t>
                 </a:r>
                 <a14:m>
                   <m:oMath xmlns:m="http://schemas.openxmlformats.org/officeDocument/2006/math">
                     <m:r>
-                      <a:rPr lang="en-US" altLang="ja-JP" sz="2400" b="0" i="0" smtClean="0">
-                        <a:latin typeface="Cambria Math" panose="02040503050406030204" pitchFamily="18" charset="0"/>
-                      </a:rPr>
-                      <m:t>(</m:t>
-                    </m:r>
-                    <m:f>
-                      <m:fPr>
-                        <m:ctrlPr>
-                          <a:rPr lang="en-US" altLang="ja-JP" sz="2400" i="1" dirty="0">
-                            <a:latin typeface="Cambria Math" panose="02040503050406030204" pitchFamily="18" charset="0"/>
-                          </a:rPr>
-                        </m:ctrlPr>
-                      </m:fPr>
-                      <m:num>
-                        <m:r>
-                          <a:rPr lang="en-US" altLang="ja-JP" sz="2400" i="1" dirty="0">
-                            <a:latin typeface="Cambria Math" panose="02040503050406030204" pitchFamily="18" charset="0"/>
-                          </a:rPr>
-                          <m:t>𝑠</m:t>
-                        </m:r>
-                      </m:num>
-                      <m:den>
-                        <m:r>
-                          <a:rPr lang="en-US" altLang="ja-JP" sz="2400" i="1" dirty="0">
-                            <a:latin typeface="Cambria Math" panose="02040503050406030204" pitchFamily="18" charset="0"/>
-                          </a:rPr>
-                          <m:t>𝑡</m:t>
-                        </m:r>
-                      </m:den>
-                    </m:f>
-                    <m:r>
-                      <a:rPr lang="en-US" altLang="ja-JP" sz="2400" b="0" i="1" dirty="0" smtClean="0">
-                        <a:latin typeface="Cambria Math" panose="02040503050406030204" pitchFamily="18" charset="0"/>
-                      </a:rPr>
-                      <m:t>=</m:t>
-                    </m:r>
-                    <m:r>
-                      <a:rPr lang="en-US" altLang="ja-JP" sz="2400" i="1">
-                        <a:latin typeface="Cambria Math" panose="02040503050406030204" pitchFamily="18" charset="0"/>
-                      </a:rPr>
-                      <m:t>𝑣</m:t>
-                    </m:r>
-                    <m:r>
-                      <a:rPr lang="en-US" altLang="ja-JP" sz="2400" b="0" i="0" smtClean="0">
-                        <a:latin typeface="Cambria Math" panose="02040503050406030204" pitchFamily="18" charset="0"/>
-                      </a:rPr>
-                      <m:t>)</m:t>
+                      <a:rPr lang="en-US" altLang="ja-JP" sz="2400" i="1" dirty="0" smtClean="0">
+                        <a:latin typeface="Cambria Math" panose="02040503050406030204" pitchFamily="18" charset="0"/>
+                      </a:rPr>
+                      <m:t>𝑟𝑎𝑑</m:t>
                     </m:r>
                   </m:oMath>
                 </a14:m>
+                <a:r>
+                  <a:rPr lang="ja-JP" altLang="en-US" sz="2400" dirty="0"/>
+                  <a:t>と書いてるだけです。</a:t>
+                </a:r>
                 <a:endParaRPr lang="en-US" altLang="ja-JP" sz="2400" dirty="0"/>
               </a:p>
               <a:p>
-                <a14:m>
-                  <m:oMath xmlns:m="http://schemas.openxmlformats.org/officeDocument/2006/math">
-                    <m:f>
-                      <m:fPr>
-                        <m:ctrlPr>
-                          <a:rPr lang="en-US" altLang="ja-JP" sz="2400" b="0" i="1" dirty="0" smtClean="0">
-                            <a:latin typeface="Cambria Math" panose="02040503050406030204" pitchFamily="18" charset="0"/>
-                          </a:rPr>
-                        </m:ctrlPr>
-                      </m:fPr>
-                      <m:num>
-                        <m:r>
-                          <m:rPr>
-                            <m:sty m:val="p"/>
-                          </m:rPr>
-                          <a:rPr lang="en-US" altLang="ja-JP" sz="2400" i="1" dirty="0">
-                            <a:latin typeface="Cambria Math" panose="02040503050406030204" pitchFamily="18" charset="0"/>
-                          </a:rPr>
-                          <m:t>θ</m:t>
-                        </m:r>
-                      </m:num>
-                      <m:den>
-                        <m:r>
-                          <a:rPr lang="en-US" altLang="ja-JP" sz="2400" b="0" i="1" dirty="0" smtClean="0">
-                            <a:latin typeface="Cambria Math" panose="02040503050406030204" pitchFamily="18" charset="0"/>
-                          </a:rPr>
-                          <m:t>𝑡</m:t>
-                        </m:r>
-                      </m:den>
-                    </m:f>
-                  </m:oMath>
-                </a14:m>
-                <a:r>
-                  <a:rPr lang="en-US" altLang="ja-JP" sz="2400" dirty="0"/>
-                  <a:t> </a:t>
-                </a:r>
                 <a:r>
                   <a:rPr lang="ja-JP" altLang="en-US" sz="2400" dirty="0"/>
-                  <a:t>は変位角を時間で割ったもの、つまり角速度である</a:t>
-                </a:r>
-                <a14:m>
-                  <m:oMath xmlns:m="http://schemas.openxmlformats.org/officeDocument/2006/math">
-                    <m:r>
-                      <a:rPr lang="en-US" altLang="ja-JP" sz="2400">
-                        <a:latin typeface="Cambria Math" panose="02040503050406030204" pitchFamily="18" charset="0"/>
-                      </a:rPr>
-                      <m:t>(</m:t>
-                    </m:r>
-                    <m:f>
-                      <m:fPr>
-                        <m:ctrlPr>
-                          <a:rPr lang="en-US" altLang="ja-JP" sz="2400" i="1" dirty="0">
-                            <a:latin typeface="Cambria Math" panose="02040503050406030204" pitchFamily="18" charset="0"/>
-                          </a:rPr>
-                        </m:ctrlPr>
-                      </m:fPr>
-                      <m:num>
-                        <m:r>
-                          <m:rPr>
-                            <m:sty m:val="p"/>
-                          </m:rPr>
-                          <a:rPr lang="en-US" altLang="ja-JP" sz="2400" i="1" dirty="0">
-                            <a:latin typeface="Cambria Math" panose="02040503050406030204" pitchFamily="18" charset="0"/>
-                          </a:rPr>
-                          <m:t>θ</m:t>
-                        </m:r>
-                      </m:num>
-                      <m:den>
-                        <m:r>
-                          <a:rPr lang="en-US" altLang="ja-JP" sz="2400" i="1" dirty="0">
-                            <a:latin typeface="Cambria Math" panose="02040503050406030204" pitchFamily="18" charset="0"/>
-                          </a:rPr>
-                          <m:t>𝑡</m:t>
-                        </m:r>
-                      </m:den>
-                    </m:f>
-                    <m:r>
-                      <a:rPr lang="en-US" altLang="ja-JP" sz="2400" b="0" i="1" dirty="0" smtClean="0">
-                        <a:latin typeface="Cambria Math" panose="02040503050406030204" pitchFamily="18" charset="0"/>
-                      </a:rPr>
-                      <m:t>=</m:t>
-                    </m:r>
-                    <m:r>
-                      <m:rPr>
-                        <m:sty m:val="p"/>
-                      </m:rPr>
-                      <a:rPr lang="en-US" altLang="ja-JP" sz="2400" i="1" smtClean="0">
-                        <a:latin typeface="Cambria Math" panose="02040503050406030204" pitchFamily="18" charset="0"/>
-                      </a:rPr>
-                      <m:t>ω</m:t>
-                    </m:r>
-                    <m:r>
-                      <a:rPr lang="en-US" altLang="ja-JP" sz="2400">
-                        <a:latin typeface="Cambria Math" panose="02040503050406030204" pitchFamily="18" charset="0"/>
-                      </a:rPr>
-                      <m:t>)</m:t>
-                    </m:r>
-                  </m:oMath>
-                </a14:m>
-                <a:endParaRPr lang="en-US" altLang="ja-JP" sz="2400" dirty="0"/>
-              </a:p>
-              <a:p>
-                <a:endParaRPr lang="en-US" altLang="ja-JP" sz="2400" dirty="0"/>
-              </a:p>
-              <a:p>
-                <a:r>
-                  <a:rPr lang="ja-JP" altLang="en-US" sz="2400" dirty="0"/>
-                  <a:t>瞬間速度と同様に、接線上の速度なので</a:t>
-                </a:r>
-                <a14:m>
-                  <m:oMath xmlns:m="http://schemas.openxmlformats.org/officeDocument/2006/math">
-                    <m:r>
-                      <a:rPr lang="en-US" altLang="ja-JP" sz="2400" i="1" dirty="0" smtClean="0">
-                        <a:latin typeface="Cambria Math" panose="02040503050406030204" pitchFamily="18" charset="0"/>
-                      </a:rPr>
-                      <m:t>𝑡</m:t>
-                    </m:r>
-                  </m:oMath>
-                </a14:m>
-                <a:r>
-                  <a:rPr lang="ja-JP" altLang="en-US" sz="2400" dirty="0"/>
-                  <a:t>は</a:t>
-                </a:r>
-                <a:r>
-                  <a:rPr lang="en-US" altLang="ja-JP" sz="2400" dirty="0"/>
-                  <a:t>0</a:t>
-                </a:r>
-                <a:r>
-                  <a:rPr lang="ja-JP" altLang="en-US" sz="2400" dirty="0"/>
-                  <a:t>に極限に近づけるため、</a:t>
-                </a:r>
-                <a:endParaRPr lang="en-US" altLang="ja-JP" sz="2400" dirty="0"/>
-              </a:p>
-              <a:p>
-                <a14:m>
-                  <m:oMath xmlns:m="http://schemas.openxmlformats.org/officeDocument/2006/math">
-                    <m:r>
-                      <a:rPr lang="en-US" altLang="ja-JP" sz="2400" b="0" i="1" dirty="0" smtClean="0">
-                        <a:latin typeface="Cambria Math" panose="02040503050406030204" pitchFamily="18" charset="0"/>
-                      </a:rPr>
-                      <m:t>𝑣</m:t>
-                    </m:r>
-                    <m:r>
-                      <a:rPr lang="en-US" altLang="ja-JP" sz="2400" b="0" i="1" baseline="-25000" dirty="0" smtClean="0">
-                        <a:latin typeface="Cambria Math" panose="02040503050406030204" pitchFamily="18" charset="0"/>
-                      </a:rPr>
-                      <m:t>𝑡</m:t>
-                    </m:r>
-                    <m:r>
-                      <a:rPr lang="en-US" altLang="ja-JP" sz="2400" b="0" i="1" dirty="0" smtClean="0">
-                        <a:latin typeface="Cambria Math" panose="02040503050406030204" pitchFamily="18" charset="0"/>
-                      </a:rPr>
-                      <m:t>=</m:t>
-                    </m:r>
-                    <m:r>
-                      <m:rPr>
-                        <m:sty m:val="p"/>
-                      </m:rPr>
-                      <a:rPr lang="en-US" altLang="ja-JP" sz="2400" i="1" dirty="0">
-                        <a:latin typeface="Cambria Math" panose="02040503050406030204" pitchFamily="18" charset="0"/>
-                      </a:rPr>
-                      <m:t>ω</m:t>
-                    </m:r>
-                    <m:r>
-                      <a:rPr lang="en-US" altLang="ja-JP" sz="2400" b="0" i="1" dirty="0" smtClean="0">
-                        <a:latin typeface="Cambria Math" panose="02040503050406030204" pitchFamily="18" charset="0"/>
-                      </a:rPr>
-                      <m:t>𝑟</m:t>
-                    </m:r>
-                  </m:oMath>
-                </a14:m>
-                <a:r>
-                  <a:rPr lang="en-US" altLang="ja-JP" sz="2400" dirty="0"/>
-                  <a:t> </a:t>
-                </a:r>
-                <a:r>
-                  <a:rPr lang="ja-JP" altLang="en-US" sz="2400" dirty="0"/>
-                  <a:t>となる</a:t>
-                </a:r>
-                <a:endParaRPr lang="en-US" altLang="ja-JP" sz="2400" dirty="0"/>
-              </a:p>
-              <a:p>
-                <a:r>
-                  <a:rPr lang="en-US" altLang="ja-JP" sz="2400" dirty="0"/>
-                  <a:t>※</a:t>
-                </a:r>
-                <a:r>
-                  <a:rPr lang="ja-JP" altLang="en-US" sz="2400" dirty="0"/>
-                  <a:t>興味がある方は時間微分について調べてみよう</a:t>
+                  <a:t>一般的にも使用されています。</a:t>
                 </a:r>
                 <a:endParaRPr lang="en-US" altLang="ja-JP" sz="2400" dirty="0"/>
               </a:p>
             </p:txBody>
           </p:sp>
         </mc:Choice>
-        <mc:Fallback>
+        <mc:Fallback xmlns="">
           <p:sp>
             <p:nvSpPr>
               <p:cNvPr id="6" name="テキスト ボックス 5">
@@ -8323,7 +8638,7 @@
             <p:spPr>
               <a:xfrm>
                 <a:off x="567542" y="1216429"/>
-                <a:ext cx="9718814" cy="5362943"/>
+                <a:ext cx="7290970" cy="4033476"/>
               </a:xfrm>
               <a:prstGeom prst="rect">
                 <a:avLst/>
@@ -8331,7 +8646,7 @@
               <a:blipFill>
                 <a:blip r:embed="rId2"/>
                 <a:stretch>
-                  <a:fillRect l="-941" t="-910" r="-63" b="-1706"/>
+                  <a:fillRect l="-1254" t="-1210" r="-334" b="-2572"/>
                 </a:stretch>
               </a:blipFill>
             </p:spPr>
@@ -8353,7 +8668,7 @@
     </p:spTree>
     <p:extLst>
       <p:ext uri="{BB962C8B-B14F-4D97-AF65-F5344CB8AC3E}">
-        <p14:creationId xmlns:p14="http://schemas.microsoft.com/office/powerpoint/2010/main" val="2149491964"/>
+        <p14:creationId xmlns:p14="http://schemas.microsoft.com/office/powerpoint/2010/main" val="2948049264"/>
       </p:ext>
     </p:extLst>
   </p:cSld>
@@ -8416,8 +8731,8 @@
           </a:p>
         </p:txBody>
       </p:sp>
-      <mc:AlternateContent xmlns:mc="http://schemas.openxmlformats.org/markup-compatibility/2006">
-        <mc:Choice xmlns:a14="http://schemas.microsoft.com/office/drawing/2010/main" Requires="a14">
+      <mc:AlternateContent xmlns:mc="http://schemas.openxmlformats.org/markup-compatibility/2006" xmlns:a14="http://schemas.microsoft.com/office/drawing/2010/main">
+        <mc:Choice Requires="a14">
           <p:sp>
             <p:nvSpPr>
               <p:cNvPr id="6" name="テキスト ボックス 5">
@@ -8433,7 +8748,7 @@
             <p:spPr>
               <a:xfrm>
                 <a:off x="567542" y="1216429"/>
-                <a:ext cx="10334368" cy="3791744"/>
+                <a:ext cx="9718814" cy="5362943"/>
               </a:xfrm>
               <a:prstGeom prst="rect">
                 <a:avLst/>
@@ -8448,14 +8763,61 @@
               <a:p>
                 <a:r>
                   <a:rPr lang="ja-JP" altLang="en-US" sz="2400" dirty="0"/>
-                  <a:t>■接線加速度の成り立ち</a:t>
+                  <a:t>■接線速度の成り立ち</a:t>
                 </a:r>
                 <a:endParaRPr lang="en-US" altLang="ja-JP" sz="2400" dirty="0"/>
               </a:p>
               <a:p>
                 <a:r>
                   <a:rPr lang="ja-JP" altLang="en-US" sz="2400" dirty="0"/>
-                  <a:t>接線速度の定義を時間 </a:t>
+                  <a:t>変位角の定義を、弧の長さを求める式に変形すると、</a:t>
+                </a:r>
+                <a:endParaRPr lang="en-US" altLang="ja-JP" sz="2400" dirty="0"/>
+              </a:p>
+              <a:p>
+                <a14:m>
+                  <m:oMath xmlns:m="http://schemas.openxmlformats.org/officeDocument/2006/math">
+                    <m:r>
+                      <a:rPr lang="en-US" altLang="ja-JP" sz="2400" b="0" i="1" dirty="0" smtClean="0">
+                        <a:latin typeface="Cambria Math" panose="02040503050406030204" pitchFamily="18" charset="0"/>
+                      </a:rPr>
+                      <m:t>𝑠</m:t>
+                    </m:r>
+                    <m:r>
+                      <a:rPr lang="en-US" altLang="ja-JP" sz="2400" b="0" i="1" dirty="0" smtClean="0">
+                        <a:latin typeface="Cambria Math" panose="02040503050406030204" pitchFamily="18" charset="0"/>
+                      </a:rPr>
+                      <m:t>=</m:t>
+                    </m:r>
+                    <m:r>
+                      <a:rPr lang="en-US" altLang="ja-JP" sz="2400" b="0" i="1" dirty="0" smtClean="0">
+                        <a:latin typeface="Cambria Math" panose="02040503050406030204" pitchFamily="18" charset="0"/>
+                      </a:rPr>
+                      <m:t>𝑟</m:t>
+                    </m:r>
+                    <m:r>
+                      <m:rPr>
+                        <m:sty m:val="p"/>
+                      </m:rPr>
+                      <a:rPr lang="en-US" altLang="ja-JP" sz="2400" i="1" dirty="0">
+                        <a:latin typeface="Cambria Math" panose="02040503050406030204" pitchFamily="18" charset="0"/>
+                      </a:rPr>
+                      <m:t>θ</m:t>
+                    </m:r>
+                  </m:oMath>
+                </a14:m>
+                <a:r>
+                  <a:rPr lang="en-US" altLang="ja-JP" sz="2400" dirty="0"/>
+                  <a:t> </a:t>
+                </a:r>
+              </a:p>
+              <a:p>
+                <a:endParaRPr lang="en-US" altLang="ja-JP" sz="2400" dirty="0"/>
+              </a:p>
+              <a:p>
+                <a:r>
+                  <a:rPr lang="ja-JP" altLang="en-US" sz="2400" dirty="0"/>
+                  <a:t>両辺を時間 </a:t>
                 </a:r>
                 <a14:m>
                   <m:oMath xmlns:m="http://schemas.openxmlformats.org/officeDocument/2006/math">
@@ -8489,13 +8851,7 @@
                           <a:rPr lang="en-US" altLang="ja-JP" sz="2400" b="0" i="1" dirty="0" smtClean="0">
                             <a:latin typeface="Cambria Math" panose="02040503050406030204" pitchFamily="18" charset="0"/>
                           </a:rPr>
-                          <m:t>𝑣</m:t>
-                        </m:r>
-                        <m:r>
-                          <a:rPr lang="en-US" altLang="ja-JP" sz="2400" b="0" i="1" baseline="-25000" dirty="0" smtClean="0">
-                            <a:latin typeface="Cambria Math" panose="02040503050406030204" pitchFamily="18" charset="0"/>
-                          </a:rPr>
-                          <m:t>𝑡</m:t>
+                          <m:t>𝑠</m:t>
                         </m:r>
                       </m:num>
                       <m:den>
@@ -8514,7 +8870,7 @@
                       <m:t>=</m:t>
                     </m:r>
                     <m:r>
-                      <a:rPr lang="en-US" altLang="ja-JP" sz="2400" i="1" dirty="0">
+                      <a:rPr lang="en-US" altLang="ja-JP" sz="2400" b="0" i="1" dirty="0" smtClean="0">
                         <a:latin typeface="Cambria Math" panose="02040503050406030204" pitchFamily="18" charset="0"/>
                       </a:rPr>
                       <m:t>𝑟</m:t>
@@ -8535,7 +8891,7 @@
                           <a:rPr lang="en-US" altLang="ja-JP" sz="2400" i="1" dirty="0">
                             <a:latin typeface="Cambria Math" panose="02040503050406030204" pitchFamily="18" charset="0"/>
                           </a:rPr>
-                          <m:t>ω</m:t>
+                          <m:t>θ</m:t>
                         </m:r>
                       </m:num>
                       <m:den>
@@ -8573,13 +8929,7 @@
                           <a:rPr lang="en-US" altLang="ja-JP" sz="2400" b="0" i="1" dirty="0" smtClean="0">
                             <a:latin typeface="Cambria Math" panose="02040503050406030204" pitchFamily="18" charset="0"/>
                           </a:rPr>
-                          <m:t>𝑣</m:t>
-                        </m:r>
-                        <m:r>
-                          <a:rPr lang="en-US" altLang="ja-JP" sz="2400" b="0" i="1" baseline="-25000" dirty="0" smtClean="0">
-                            <a:latin typeface="Cambria Math" panose="02040503050406030204" pitchFamily="18" charset="0"/>
-                          </a:rPr>
-                          <m:t>𝑡</m:t>
+                          <m:t>𝑠</m:t>
                         </m:r>
                       </m:num>
                       <m:den>
@@ -8595,12 +8945,12 @@
                 </a14:m>
                 <a:r>
                   <a:rPr lang="ja-JP" altLang="en-US" sz="2400" dirty="0"/>
-                  <a:t>は速度を時間で割ったもの、つまり加速度である</a:t>
+                  <a:t> は弧の長さを時間で割ったもの、つまり速度である</a:t>
                 </a:r>
                 <a14:m>
                   <m:oMath xmlns:m="http://schemas.openxmlformats.org/officeDocument/2006/math">
                     <m:r>
-                      <a:rPr lang="en-US" altLang="ja-JP" sz="2400" b="0" i="0" dirty="0" smtClean="0">
+                      <a:rPr lang="en-US" altLang="ja-JP" sz="2400" b="0" i="0" smtClean="0">
                         <a:latin typeface="Cambria Math" panose="02040503050406030204" pitchFamily="18" charset="0"/>
                       </a:rPr>
                       <m:t>(</m:t>
@@ -8618,13 +8968,7 @@
                           <a:rPr lang="en-US" altLang="ja-JP" sz="2400" i="1" dirty="0">
                             <a:latin typeface="Cambria Math" panose="02040503050406030204" pitchFamily="18" charset="0"/>
                           </a:rPr>
-                          <m:t>𝑣</m:t>
-                        </m:r>
-                        <m:r>
-                          <a:rPr lang="en-US" altLang="ja-JP" sz="2400" i="1" baseline="-25000" dirty="0">
-                            <a:latin typeface="Cambria Math" panose="02040503050406030204" pitchFamily="18" charset="0"/>
-                          </a:rPr>
-                          <m:t>𝑡</m:t>
+                          <m:t>𝑠</m:t>
                         </m:r>
                       </m:num>
                       <m:den>
@@ -8643,13 +8987,13 @@
                       <m:t>=</m:t>
                     </m:r>
                     <m:r>
-                      <a:rPr lang="en-US" altLang="ja-JP" sz="2400" b="0" i="1" dirty="0" smtClean="0">
-                        <a:latin typeface="Cambria Math" panose="02040503050406030204" pitchFamily="18" charset="0"/>
-                      </a:rPr>
-                      <m:t>𝑎</m:t>
-                    </m:r>
-                    <m:r>
-                      <a:rPr lang="en-US" altLang="ja-JP" sz="2400" b="0" i="1" dirty="0" smtClean="0">
+                      <a:rPr lang="en-US" altLang="ja-JP" sz="2400" i="1">
+                        <a:latin typeface="Cambria Math" panose="02040503050406030204" pitchFamily="18" charset="0"/>
+                      </a:rPr>
+                      <m:t>𝑣</m:t>
+                    </m:r>
+                    <m:r>
+                      <a:rPr lang="en-US" altLang="ja-JP" sz="2400" b="0" i="0" smtClean="0">
                         <a:latin typeface="Cambria Math" panose="02040503050406030204" pitchFamily="18" charset="0"/>
                       </a:rPr>
                       <m:t>)</m:t>
@@ -8677,7 +9021,7 @@
                           <a:rPr lang="en-US" altLang="ja-JP" sz="2400" i="1" dirty="0">
                             <a:latin typeface="Cambria Math" panose="02040503050406030204" pitchFamily="18" charset="0"/>
                           </a:rPr>
-                          <m:t>ω</m:t>
+                          <m:t>θ</m:t>
                         </m:r>
                       </m:num>
                       <m:den>
@@ -8692,13 +9036,17 @@
                   </m:oMath>
                 </a14:m>
                 <a:r>
+                  <a:rPr lang="en-US" altLang="ja-JP" sz="2400" dirty="0"/>
+                  <a:t> </a:t>
+                </a:r>
+                <a:r>
                   <a:rPr lang="ja-JP" altLang="en-US" sz="2400" dirty="0"/>
-                  <a:t>は角速度を時間で割ったもの、つまり角加速度である</a:t>
+                  <a:t>は変位角を時間で割ったもの、つまり角速度である</a:t>
                 </a:r>
                 <a14:m>
                   <m:oMath xmlns:m="http://schemas.openxmlformats.org/officeDocument/2006/math">
                     <m:r>
-                      <a:rPr lang="en-US" altLang="ja-JP" sz="2400" dirty="0">
+                      <a:rPr lang="en-US" altLang="ja-JP" sz="2400">
                         <a:latin typeface="Cambria Math" panose="02040503050406030204" pitchFamily="18" charset="0"/>
                       </a:rPr>
                       <m:t>(</m:t>
@@ -8706,7 +9054,7 @@
                     <m:f>
                       <m:fPr>
                         <m:ctrlPr>
-                          <a:rPr lang="en-US" altLang="ja-JP" sz="2400" b="0" i="1" dirty="0" smtClean="0">
+                          <a:rPr lang="en-US" altLang="ja-JP" sz="2400" i="1" dirty="0">
                             <a:latin typeface="Cambria Math" panose="02040503050406030204" pitchFamily="18" charset="0"/>
                           </a:rPr>
                         </m:ctrlPr>
@@ -8716,15 +9064,15 @@
                           <m:rPr>
                             <m:sty m:val="p"/>
                           </m:rPr>
-                          <a:rPr lang="en-US" altLang="ja-JP" sz="2400" i="1" dirty="0" smtClean="0">
+                          <a:rPr lang="en-US" altLang="ja-JP" sz="2400" i="1" dirty="0">
                             <a:latin typeface="Cambria Math" panose="02040503050406030204" pitchFamily="18" charset="0"/>
                           </a:rPr>
-                          <m:t>ω</m:t>
+                          <m:t>θ</m:t>
                         </m:r>
                       </m:num>
                       <m:den>
                         <m:r>
-                          <a:rPr lang="en-US" altLang="ja-JP" sz="2400" b="0" i="1" dirty="0" smtClean="0">
+                          <a:rPr lang="en-US" altLang="ja-JP" sz="2400" i="1" dirty="0">
                             <a:latin typeface="Cambria Math" panose="02040503050406030204" pitchFamily="18" charset="0"/>
                           </a:rPr>
                           <m:t>𝑡</m:t>
@@ -8732,7 +9080,7 @@
                       </m:den>
                     </m:f>
                     <m:r>
-                      <a:rPr lang="en-US" altLang="ja-JP" sz="2400" i="1" dirty="0">
+                      <a:rPr lang="en-US" altLang="ja-JP" sz="2400" b="0" i="1" dirty="0" smtClean="0">
                         <a:latin typeface="Cambria Math" panose="02040503050406030204" pitchFamily="18" charset="0"/>
                       </a:rPr>
                       <m:t>=</m:t>
@@ -8741,13 +9089,13 @@
                       <m:rPr>
                         <m:sty m:val="p"/>
                       </m:rPr>
-                      <a:rPr lang="en-US" altLang="ja-JP" sz="2400" i="1" dirty="0" smtClean="0">
-                        <a:latin typeface="Cambria Math" panose="02040503050406030204" pitchFamily="18" charset="0"/>
-                      </a:rPr>
-                      <m:t>α</m:t>
-                    </m:r>
-                    <m:r>
-                      <a:rPr lang="en-US" altLang="ja-JP" sz="2400" i="1" dirty="0">
+                      <a:rPr lang="en-US" altLang="ja-JP" sz="2400" i="1" smtClean="0">
+                        <a:latin typeface="Cambria Math" panose="02040503050406030204" pitchFamily="18" charset="0"/>
+                      </a:rPr>
+                      <m:t>ω</m:t>
+                    </m:r>
+                    <m:r>
+                      <a:rPr lang="en-US" altLang="ja-JP" sz="2400">
                         <a:latin typeface="Cambria Math" panose="02040503050406030204" pitchFamily="18" charset="0"/>
                       </a:rPr>
                       <m:t>)</m:t>
@@ -8762,7 +9110,7 @@
               <a:p>
                 <a:r>
                   <a:rPr lang="ja-JP" altLang="en-US" sz="2400" dirty="0"/>
-                  <a:t>瞬間加速度と同様に、接線上の加速度なので</a:t>
+                  <a:t>瞬間速度と同様に、接線上の速度なので</a:t>
                 </a:r>
                 <a14:m>
                   <m:oMath xmlns:m="http://schemas.openxmlformats.org/officeDocument/2006/math">
@@ -8792,19 +9140,19 @@
                 <a14:m>
                   <m:oMath xmlns:m="http://schemas.openxmlformats.org/officeDocument/2006/math">
                     <m:r>
-                      <a:rPr lang="en-US" altLang="ja-JP" sz="2400" i="1">
-                        <a:latin typeface="Cambria Math" panose="02040503050406030204" pitchFamily="18" charset="0"/>
-                      </a:rPr>
-                      <m:t>𝑎</m:t>
-                    </m:r>
-                    <m:r>
-                      <a:rPr lang="en-US" altLang="ja-JP" sz="2400" i="1" baseline="-25000">
+                      <a:rPr lang="en-US" altLang="ja-JP" sz="2400" b="0" i="1" dirty="0" smtClean="0">
+                        <a:latin typeface="Cambria Math" panose="02040503050406030204" pitchFamily="18" charset="0"/>
+                      </a:rPr>
+                      <m:t>𝑣</m:t>
+                    </m:r>
+                    <m:r>
+                      <a:rPr lang="en-US" altLang="ja-JP" sz="2400" b="0" i="1" baseline="-25000" dirty="0" smtClean="0">
                         <a:latin typeface="Cambria Math" panose="02040503050406030204" pitchFamily="18" charset="0"/>
                       </a:rPr>
                       <m:t>𝑡</m:t>
                     </m:r>
                     <m:r>
-                      <a:rPr lang="en-US" altLang="ja-JP" sz="2400" i="1">
+                      <a:rPr lang="en-US" altLang="ja-JP" sz="2400" b="0" i="1" dirty="0" smtClean="0">
                         <a:latin typeface="Cambria Math" panose="02040503050406030204" pitchFamily="18" charset="0"/>
                       </a:rPr>
                       <m:t>=</m:t>
@@ -8813,13 +9161,13 @@
                       <m:rPr>
                         <m:sty m:val="p"/>
                       </m:rPr>
-                      <a:rPr lang="en-US" altLang="ja-JP" sz="2400" i="1">
-                        <a:latin typeface="Cambria Math" panose="02040503050406030204" pitchFamily="18" charset="0"/>
-                      </a:rPr>
-                      <m:t>α</m:t>
-                    </m:r>
-                    <m:r>
-                      <a:rPr lang="en-US" altLang="ja-JP" sz="2400" i="1">
+                      <a:rPr lang="en-US" altLang="ja-JP" sz="2400" i="1" dirty="0">
+                        <a:latin typeface="Cambria Math" panose="02040503050406030204" pitchFamily="18" charset="0"/>
+                      </a:rPr>
+                      <m:t>ω</m:t>
+                    </m:r>
+                    <m:r>
+                      <a:rPr lang="en-US" altLang="ja-JP" sz="2400" b="0" i="1" dirty="0" smtClean="0">
                         <a:latin typeface="Cambria Math" panose="02040503050406030204" pitchFamily="18" charset="0"/>
                       </a:rPr>
                       <m:t>𝑟</m:t>
@@ -8833,13 +9181,24 @@
                 <a:r>
                   <a:rPr lang="ja-JP" altLang="en-US" sz="2400" dirty="0"/>
                   <a:t>となる</a:t>
+                </a:r>
+                <a:endParaRPr lang="en-US" altLang="ja-JP" sz="2400" dirty="0"/>
+              </a:p>
+              <a:p>
+                <a:r>
+                  <a:rPr lang="en-US" altLang="ja-JP" sz="2400" dirty="0"/>
+                  <a:t>※</a:t>
+                </a:r>
+                <a:r>
+                  <a:rPr lang="ja-JP" altLang="en-US" sz="2400" dirty="0"/>
+                  <a:t>興味がある方は時間微分について調べてみよう</a:t>
                 </a:r>
                 <a:endParaRPr lang="en-US" altLang="ja-JP" sz="2400" dirty="0"/>
               </a:p>
             </p:txBody>
           </p:sp>
         </mc:Choice>
-        <mc:Fallback>
+        <mc:Fallback xmlns="">
           <p:sp>
             <p:nvSpPr>
               <p:cNvPr id="6" name="テキスト ボックス 5">
@@ -8857,7 +9216,7 @@
             <p:spPr>
               <a:xfrm>
                 <a:off x="567542" y="1216429"/>
-                <a:ext cx="10334368" cy="3791744"/>
+                <a:ext cx="9718814" cy="5362943"/>
               </a:xfrm>
               <a:prstGeom prst="rect">
                 <a:avLst/>
@@ -8865,7 +9224,7 @@
               <a:blipFill>
                 <a:blip r:embed="rId2"/>
                 <a:stretch>
-                  <a:fillRect l="-885" t="-1286" b="-2733"/>
+                  <a:fillRect l="-941" t="-910" r="-63" b="-1706"/>
                 </a:stretch>
               </a:blipFill>
             </p:spPr>
@@ -8887,7 +9246,7 @@
     </p:spTree>
     <p:extLst>
       <p:ext uri="{BB962C8B-B14F-4D97-AF65-F5344CB8AC3E}">
-        <p14:creationId xmlns:p14="http://schemas.microsoft.com/office/powerpoint/2010/main" val="3665387649"/>
+        <p14:creationId xmlns:p14="http://schemas.microsoft.com/office/powerpoint/2010/main" val="2149491964"/>
       </p:ext>
     </p:extLst>
   </p:cSld>

--- a/ゲーム科2年/00_前期/ゲーム開発Ⅲ/ゲーム物理学/座学/28_接線速度と接線加速度.pptx
+++ b/ゲーム科2年/00_前期/ゲーム開発Ⅲ/ゲーム物理学/座学/28_接線速度と接線加速度.pptx
@@ -13,8 +13,9 @@
     <p:sldId id="266" r:id="rId7"/>
     <p:sldId id="267" r:id="rId8"/>
     <p:sldId id="270" r:id="rId9"/>
-    <p:sldId id="268" r:id="rId10"/>
-    <p:sldId id="269" r:id="rId11"/>
+    <p:sldId id="271" r:id="rId10"/>
+    <p:sldId id="268" r:id="rId11"/>
+    <p:sldId id="269" r:id="rId12"/>
   </p:sldIdLst>
   <p:sldSz cx="12192000" cy="6858000"/>
   <p:notesSz cx="6858000" cy="9144000"/>
@@ -268,7 +269,7 @@
           <a:p>
             <a:fld id="{E9CC885B-4903-4D54-9A93-00025F12DED9}" type="datetimeFigureOut">
               <a:rPr kumimoji="1" lang="ja-JP" altLang="en-US" smtClean="0"/>
-              <a:t>2025/11/4</a:t>
+              <a:t>2025/11/12</a:t>
             </a:fld>
             <a:endParaRPr kumimoji="1" lang="ja-JP" altLang="en-US"/>
           </a:p>
@@ -498,7 +499,7 @@
           <a:p>
             <a:fld id="{E9CC885B-4903-4D54-9A93-00025F12DED9}" type="datetimeFigureOut">
               <a:rPr kumimoji="1" lang="ja-JP" altLang="en-US" smtClean="0"/>
-              <a:t>2025/11/4</a:t>
+              <a:t>2025/11/12</a:t>
             </a:fld>
             <a:endParaRPr kumimoji="1" lang="ja-JP" altLang="en-US"/>
           </a:p>
@@ -738,7 +739,7 @@
           <a:p>
             <a:fld id="{E9CC885B-4903-4D54-9A93-00025F12DED9}" type="datetimeFigureOut">
               <a:rPr kumimoji="1" lang="ja-JP" altLang="en-US" smtClean="0"/>
-              <a:t>2025/11/4</a:t>
+              <a:t>2025/11/12</a:t>
             </a:fld>
             <a:endParaRPr kumimoji="1" lang="ja-JP" altLang="en-US"/>
           </a:p>
@@ -968,7 +969,7 @@
           <a:p>
             <a:fld id="{E9CC885B-4903-4D54-9A93-00025F12DED9}" type="datetimeFigureOut">
               <a:rPr kumimoji="1" lang="ja-JP" altLang="en-US" smtClean="0"/>
-              <a:t>2025/11/4</a:t>
+              <a:t>2025/11/12</a:t>
             </a:fld>
             <a:endParaRPr kumimoji="1" lang="ja-JP" altLang="en-US"/>
           </a:p>
@@ -1243,7 +1244,7 @@
           <a:p>
             <a:fld id="{E9CC885B-4903-4D54-9A93-00025F12DED9}" type="datetimeFigureOut">
               <a:rPr kumimoji="1" lang="ja-JP" altLang="en-US" smtClean="0"/>
-              <a:t>2025/11/4</a:t>
+              <a:t>2025/11/12</a:t>
             </a:fld>
             <a:endParaRPr kumimoji="1" lang="ja-JP" altLang="en-US"/>
           </a:p>
@@ -1572,7 +1573,7 @@
           <a:p>
             <a:fld id="{E9CC885B-4903-4D54-9A93-00025F12DED9}" type="datetimeFigureOut">
               <a:rPr kumimoji="1" lang="ja-JP" altLang="en-US" smtClean="0"/>
-              <a:t>2025/11/4</a:t>
+              <a:t>2025/11/12</a:t>
             </a:fld>
             <a:endParaRPr kumimoji="1" lang="ja-JP" altLang="en-US"/>
           </a:p>
@@ -2048,7 +2049,7 @@
           <a:p>
             <a:fld id="{E9CC885B-4903-4D54-9A93-00025F12DED9}" type="datetimeFigureOut">
               <a:rPr kumimoji="1" lang="ja-JP" altLang="en-US" smtClean="0"/>
-              <a:t>2025/11/4</a:t>
+              <a:t>2025/11/12</a:t>
             </a:fld>
             <a:endParaRPr kumimoji="1" lang="ja-JP" altLang="en-US"/>
           </a:p>
@@ -2189,7 +2190,7 @@
           <a:p>
             <a:fld id="{E9CC885B-4903-4D54-9A93-00025F12DED9}" type="datetimeFigureOut">
               <a:rPr kumimoji="1" lang="ja-JP" altLang="en-US" smtClean="0"/>
-              <a:t>2025/11/4</a:t>
+              <a:t>2025/11/12</a:t>
             </a:fld>
             <a:endParaRPr kumimoji="1" lang="ja-JP" altLang="en-US"/>
           </a:p>
@@ -2302,7 +2303,7 @@
           <a:p>
             <a:fld id="{E9CC885B-4903-4D54-9A93-00025F12DED9}" type="datetimeFigureOut">
               <a:rPr kumimoji="1" lang="ja-JP" altLang="en-US" smtClean="0"/>
-              <a:t>2025/11/4</a:t>
+              <a:t>2025/11/12</a:t>
             </a:fld>
             <a:endParaRPr kumimoji="1" lang="ja-JP" altLang="en-US"/>
           </a:p>
@@ -2645,7 +2646,7 @@
           <a:p>
             <a:fld id="{E9CC885B-4903-4D54-9A93-00025F12DED9}" type="datetimeFigureOut">
               <a:rPr kumimoji="1" lang="ja-JP" altLang="en-US" smtClean="0"/>
-              <a:t>2025/11/4</a:t>
+              <a:t>2025/11/12</a:t>
             </a:fld>
             <a:endParaRPr kumimoji="1" lang="ja-JP" altLang="en-US"/>
           </a:p>
@@ -2933,7 +2934,7 @@
           <a:p>
             <a:fld id="{E9CC885B-4903-4D54-9A93-00025F12DED9}" type="datetimeFigureOut">
               <a:rPr kumimoji="1" lang="ja-JP" altLang="en-US" smtClean="0"/>
-              <a:t>2025/11/4</a:t>
+              <a:t>2025/11/12</a:t>
             </a:fld>
             <a:endParaRPr kumimoji="1" lang="ja-JP" altLang="en-US"/>
           </a:p>
@@ -3206,7 +3207,7 @@
           <a:p>
             <a:fld id="{E9CC885B-4903-4D54-9A93-00025F12DED9}" type="datetimeFigureOut">
               <a:rPr kumimoji="1" lang="ja-JP" altLang="en-US" smtClean="0"/>
-              <a:t>2025/11/4</a:t>
+              <a:t>2025/11/12</a:t>
             </a:fld>
             <a:endParaRPr kumimoji="1" lang="ja-JP" altLang="en-US"/>
           </a:p>
@@ -4745,6 +4746,584 @@
             <p:spPr>
               <a:xfrm>
                 <a:off x="567542" y="1216429"/>
+                <a:ext cx="9718814" cy="5362943"/>
+              </a:xfrm>
+              <a:prstGeom prst="rect">
+                <a:avLst/>
+              </a:prstGeom>
+              <a:noFill/>
+            </p:spPr>
+            <p:txBody>
+              <a:bodyPr wrap="none" rtlCol="0">
+                <a:spAutoFit/>
+              </a:bodyPr>
+              <a:lstStyle/>
+              <a:p>
+                <a:r>
+                  <a:rPr lang="ja-JP" altLang="en-US" sz="2400" dirty="0"/>
+                  <a:t>■接線速度の成り立ち</a:t>
+                </a:r>
+                <a:endParaRPr lang="en-US" altLang="ja-JP" sz="2400" dirty="0"/>
+              </a:p>
+              <a:p>
+                <a:r>
+                  <a:rPr lang="ja-JP" altLang="en-US" sz="2400" dirty="0"/>
+                  <a:t>変位角の定義を、弧の長さを求める式に変形すると、</a:t>
+                </a:r>
+                <a:endParaRPr lang="en-US" altLang="ja-JP" sz="2400" dirty="0"/>
+              </a:p>
+              <a:p>
+                <a14:m>
+                  <m:oMath xmlns:m="http://schemas.openxmlformats.org/officeDocument/2006/math">
+                    <m:r>
+                      <a:rPr lang="en-US" altLang="ja-JP" sz="2400" b="0" i="1" dirty="0" smtClean="0">
+                        <a:latin typeface="Cambria Math" panose="02040503050406030204" pitchFamily="18" charset="0"/>
+                      </a:rPr>
+                      <m:t>𝑠</m:t>
+                    </m:r>
+                    <m:r>
+                      <a:rPr lang="en-US" altLang="ja-JP" sz="2400" b="0" i="1" dirty="0" smtClean="0">
+                        <a:latin typeface="Cambria Math" panose="02040503050406030204" pitchFamily="18" charset="0"/>
+                      </a:rPr>
+                      <m:t>=</m:t>
+                    </m:r>
+                    <m:r>
+                      <a:rPr lang="en-US" altLang="ja-JP" sz="2400" b="0" i="1" dirty="0" smtClean="0">
+                        <a:latin typeface="Cambria Math" panose="02040503050406030204" pitchFamily="18" charset="0"/>
+                      </a:rPr>
+                      <m:t>𝑟</m:t>
+                    </m:r>
+                    <m:r>
+                      <m:rPr>
+                        <m:sty m:val="p"/>
+                      </m:rPr>
+                      <a:rPr lang="en-US" altLang="ja-JP" sz="2400" i="1" dirty="0">
+                        <a:latin typeface="Cambria Math" panose="02040503050406030204" pitchFamily="18" charset="0"/>
+                      </a:rPr>
+                      <m:t>θ</m:t>
+                    </m:r>
+                  </m:oMath>
+                </a14:m>
+                <a:r>
+                  <a:rPr lang="en-US" altLang="ja-JP" sz="2400" dirty="0"/>
+                  <a:t> </a:t>
+                </a:r>
+              </a:p>
+              <a:p>
+                <a:endParaRPr lang="en-US" altLang="ja-JP" sz="2400" dirty="0"/>
+              </a:p>
+              <a:p>
+                <a:r>
+                  <a:rPr lang="ja-JP" altLang="en-US" sz="2400" dirty="0"/>
+                  <a:t>両辺を時間 </a:t>
+                </a:r>
+                <a14:m>
+                  <m:oMath xmlns:m="http://schemas.openxmlformats.org/officeDocument/2006/math">
+                    <m:r>
+                      <a:rPr lang="en-US" altLang="ja-JP" sz="2400" i="1" dirty="0" smtClean="0">
+                        <a:latin typeface="Cambria Math" panose="02040503050406030204" pitchFamily="18" charset="0"/>
+                      </a:rPr>
+                      <m:t>𝑡</m:t>
+                    </m:r>
+                  </m:oMath>
+                </a14:m>
+                <a:r>
+                  <a:rPr lang="ja-JP" altLang="en-US" sz="2400" dirty="0"/>
+                  <a:t> で割ると、</a:t>
+                </a:r>
+                <a:endParaRPr lang="en-US" altLang="ja-JP" sz="2400" dirty="0"/>
+              </a:p>
+              <a:p>
+                <a14:m>
+                  <m:oMath xmlns:m="http://schemas.openxmlformats.org/officeDocument/2006/math">
+                    <m:f>
+                      <m:fPr>
+                        <m:ctrlPr>
+                          <a:rPr lang="en-US" altLang="ja-JP" sz="2400" b="0" i="1" dirty="0" smtClean="0">
+                            <a:latin typeface="Cambria Math" panose="02040503050406030204" pitchFamily="18" charset="0"/>
+                          </a:rPr>
+                        </m:ctrlPr>
+                      </m:fPr>
+                      <m:num>
+                        <m:r>
+                          <a:rPr lang="en-US" altLang="ja-JP" sz="2400" b="0" i="1" dirty="0" smtClean="0">
+                            <a:latin typeface="Cambria Math" panose="02040503050406030204" pitchFamily="18" charset="0"/>
+                          </a:rPr>
+                          <m:t>𝑠</m:t>
+                        </m:r>
+                      </m:num>
+                      <m:den>
+                        <m:r>
+                          <a:rPr lang="en-US" altLang="ja-JP" sz="2400" b="0" i="1" dirty="0" smtClean="0">
+                            <a:latin typeface="Cambria Math" panose="02040503050406030204" pitchFamily="18" charset="0"/>
+                          </a:rPr>
+                          <m:t>𝑡</m:t>
+                        </m:r>
+                      </m:den>
+                    </m:f>
+                    <m:r>
+                      <a:rPr lang="en-US" altLang="ja-JP" sz="2400" b="0" i="1" dirty="0" smtClean="0">
+                        <a:latin typeface="Cambria Math" panose="02040503050406030204" pitchFamily="18" charset="0"/>
+                      </a:rPr>
+                      <m:t>=</m:t>
+                    </m:r>
+                    <m:r>
+                      <a:rPr lang="en-US" altLang="ja-JP" sz="2400" b="0" i="1" dirty="0" smtClean="0">
+                        <a:latin typeface="Cambria Math" panose="02040503050406030204" pitchFamily="18" charset="0"/>
+                      </a:rPr>
+                      <m:t>𝑟</m:t>
+                    </m:r>
+                    <m:f>
+                      <m:fPr>
+                        <m:ctrlPr>
+                          <a:rPr lang="en-US" altLang="ja-JP" sz="2400" b="0" i="1" dirty="0" smtClean="0">
+                            <a:latin typeface="Cambria Math" panose="02040503050406030204" pitchFamily="18" charset="0"/>
+                          </a:rPr>
+                        </m:ctrlPr>
+                      </m:fPr>
+                      <m:num>
+                        <m:r>
+                          <m:rPr>
+                            <m:sty m:val="p"/>
+                          </m:rPr>
+                          <a:rPr lang="en-US" altLang="ja-JP" sz="2400" i="1" dirty="0">
+                            <a:latin typeface="Cambria Math" panose="02040503050406030204" pitchFamily="18" charset="0"/>
+                          </a:rPr>
+                          <m:t>θ</m:t>
+                        </m:r>
+                      </m:num>
+                      <m:den>
+                        <m:r>
+                          <a:rPr lang="en-US" altLang="ja-JP" sz="2400" b="0" i="1" dirty="0" smtClean="0">
+                            <a:latin typeface="Cambria Math" panose="02040503050406030204" pitchFamily="18" charset="0"/>
+                          </a:rPr>
+                          <m:t>𝑡</m:t>
+                        </m:r>
+                      </m:den>
+                    </m:f>
+                  </m:oMath>
+                </a14:m>
+                <a:r>
+                  <a:rPr lang="en-US" altLang="ja-JP" sz="2400" dirty="0"/>
+                  <a:t> </a:t>
+                </a:r>
+              </a:p>
+              <a:p>
+                <a:endParaRPr lang="en-US" altLang="ja-JP" sz="2400" dirty="0"/>
+              </a:p>
+              <a:p>
+                <a14:m>
+                  <m:oMath xmlns:m="http://schemas.openxmlformats.org/officeDocument/2006/math">
+                    <m:f>
+                      <m:fPr>
+                        <m:ctrlPr>
+                          <a:rPr lang="en-US" altLang="ja-JP" sz="2400" b="0" i="1" dirty="0" smtClean="0">
+                            <a:latin typeface="Cambria Math" panose="02040503050406030204" pitchFamily="18" charset="0"/>
+                          </a:rPr>
+                        </m:ctrlPr>
+                      </m:fPr>
+                      <m:num>
+                        <m:r>
+                          <a:rPr lang="en-US" altLang="ja-JP" sz="2400" b="0" i="1" dirty="0" smtClean="0">
+                            <a:latin typeface="Cambria Math" panose="02040503050406030204" pitchFamily="18" charset="0"/>
+                          </a:rPr>
+                          <m:t>𝑠</m:t>
+                        </m:r>
+                      </m:num>
+                      <m:den>
+                        <m:r>
+                          <a:rPr lang="en-US" altLang="ja-JP" sz="2400" b="0" i="1" dirty="0" smtClean="0">
+                            <a:latin typeface="Cambria Math" panose="02040503050406030204" pitchFamily="18" charset="0"/>
+                          </a:rPr>
+                          <m:t>𝑡</m:t>
+                        </m:r>
+                      </m:den>
+                    </m:f>
+                  </m:oMath>
+                </a14:m>
+                <a:r>
+                  <a:rPr lang="ja-JP" altLang="en-US" sz="2400" dirty="0"/>
+                  <a:t> は弧の長さを時間で割ったもの、つまり速度である</a:t>
+                </a:r>
+                <a14:m>
+                  <m:oMath xmlns:m="http://schemas.openxmlformats.org/officeDocument/2006/math">
+                    <m:r>
+                      <a:rPr lang="en-US" altLang="ja-JP" sz="2400" b="0" i="0" smtClean="0">
+                        <a:latin typeface="Cambria Math" panose="02040503050406030204" pitchFamily="18" charset="0"/>
+                      </a:rPr>
+                      <m:t>(</m:t>
+                    </m:r>
+                    <m:f>
+                      <m:fPr>
+                        <m:ctrlPr>
+                          <a:rPr lang="en-US" altLang="ja-JP" sz="2400" i="1" dirty="0">
+                            <a:latin typeface="Cambria Math" panose="02040503050406030204" pitchFamily="18" charset="0"/>
+                          </a:rPr>
+                        </m:ctrlPr>
+                      </m:fPr>
+                      <m:num>
+                        <m:r>
+                          <a:rPr lang="en-US" altLang="ja-JP" sz="2400" i="1" dirty="0">
+                            <a:latin typeface="Cambria Math" panose="02040503050406030204" pitchFamily="18" charset="0"/>
+                          </a:rPr>
+                          <m:t>𝑠</m:t>
+                        </m:r>
+                      </m:num>
+                      <m:den>
+                        <m:r>
+                          <a:rPr lang="en-US" altLang="ja-JP" sz="2400" i="1" dirty="0">
+                            <a:latin typeface="Cambria Math" panose="02040503050406030204" pitchFamily="18" charset="0"/>
+                          </a:rPr>
+                          <m:t>𝑡</m:t>
+                        </m:r>
+                      </m:den>
+                    </m:f>
+                    <m:r>
+                      <a:rPr lang="en-US" altLang="ja-JP" sz="2400" b="0" i="1" dirty="0" smtClean="0">
+                        <a:latin typeface="Cambria Math" panose="02040503050406030204" pitchFamily="18" charset="0"/>
+                      </a:rPr>
+                      <m:t>=</m:t>
+                    </m:r>
+                    <m:r>
+                      <a:rPr lang="en-US" altLang="ja-JP" sz="2400" i="1">
+                        <a:latin typeface="Cambria Math" panose="02040503050406030204" pitchFamily="18" charset="0"/>
+                      </a:rPr>
+                      <m:t>𝑣</m:t>
+                    </m:r>
+                    <m:r>
+                      <a:rPr lang="en-US" altLang="ja-JP" sz="2400" b="0" i="0" smtClean="0">
+                        <a:latin typeface="Cambria Math" panose="02040503050406030204" pitchFamily="18" charset="0"/>
+                      </a:rPr>
+                      <m:t>)</m:t>
+                    </m:r>
+                  </m:oMath>
+                </a14:m>
+                <a:endParaRPr lang="en-US" altLang="ja-JP" sz="2400" dirty="0"/>
+              </a:p>
+              <a:p>
+                <a14:m>
+                  <m:oMath xmlns:m="http://schemas.openxmlformats.org/officeDocument/2006/math">
+                    <m:f>
+                      <m:fPr>
+                        <m:ctrlPr>
+                          <a:rPr lang="en-US" altLang="ja-JP" sz="2400" b="0" i="1" dirty="0" smtClean="0">
+                            <a:latin typeface="Cambria Math" panose="02040503050406030204" pitchFamily="18" charset="0"/>
+                          </a:rPr>
+                        </m:ctrlPr>
+                      </m:fPr>
+                      <m:num>
+                        <m:r>
+                          <m:rPr>
+                            <m:sty m:val="p"/>
+                          </m:rPr>
+                          <a:rPr lang="en-US" altLang="ja-JP" sz="2400" i="1" dirty="0">
+                            <a:latin typeface="Cambria Math" panose="02040503050406030204" pitchFamily="18" charset="0"/>
+                          </a:rPr>
+                          <m:t>θ</m:t>
+                        </m:r>
+                      </m:num>
+                      <m:den>
+                        <m:r>
+                          <a:rPr lang="en-US" altLang="ja-JP" sz="2400" b="0" i="1" dirty="0" smtClean="0">
+                            <a:latin typeface="Cambria Math" panose="02040503050406030204" pitchFamily="18" charset="0"/>
+                          </a:rPr>
+                          <m:t>𝑡</m:t>
+                        </m:r>
+                      </m:den>
+                    </m:f>
+                  </m:oMath>
+                </a14:m>
+                <a:r>
+                  <a:rPr lang="en-US" altLang="ja-JP" sz="2400" dirty="0"/>
+                  <a:t> </a:t>
+                </a:r>
+                <a:r>
+                  <a:rPr lang="ja-JP" altLang="en-US" sz="2400" dirty="0"/>
+                  <a:t>は変位角を時間で割ったもの、つまり角速度である</a:t>
+                </a:r>
+                <a14:m>
+                  <m:oMath xmlns:m="http://schemas.openxmlformats.org/officeDocument/2006/math">
+                    <m:r>
+                      <a:rPr lang="en-US" altLang="ja-JP" sz="2400">
+                        <a:latin typeface="Cambria Math" panose="02040503050406030204" pitchFamily="18" charset="0"/>
+                      </a:rPr>
+                      <m:t>(</m:t>
+                    </m:r>
+                    <m:f>
+                      <m:fPr>
+                        <m:ctrlPr>
+                          <a:rPr lang="en-US" altLang="ja-JP" sz="2400" i="1" dirty="0">
+                            <a:latin typeface="Cambria Math" panose="02040503050406030204" pitchFamily="18" charset="0"/>
+                          </a:rPr>
+                        </m:ctrlPr>
+                      </m:fPr>
+                      <m:num>
+                        <m:r>
+                          <m:rPr>
+                            <m:sty m:val="p"/>
+                          </m:rPr>
+                          <a:rPr lang="en-US" altLang="ja-JP" sz="2400" i="1" dirty="0">
+                            <a:latin typeface="Cambria Math" panose="02040503050406030204" pitchFamily="18" charset="0"/>
+                          </a:rPr>
+                          <m:t>θ</m:t>
+                        </m:r>
+                      </m:num>
+                      <m:den>
+                        <m:r>
+                          <a:rPr lang="en-US" altLang="ja-JP" sz="2400" i="1" dirty="0">
+                            <a:latin typeface="Cambria Math" panose="02040503050406030204" pitchFamily="18" charset="0"/>
+                          </a:rPr>
+                          <m:t>𝑡</m:t>
+                        </m:r>
+                      </m:den>
+                    </m:f>
+                    <m:r>
+                      <a:rPr lang="en-US" altLang="ja-JP" sz="2400" b="0" i="1" dirty="0" smtClean="0">
+                        <a:latin typeface="Cambria Math" panose="02040503050406030204" pitchFamily="18" charset="0"/>
+                      </a:rPr>
+                      <m:t>=</m:t>
+                    </m:r>
+                    <m:r>
+                      <m:rPr>
+                        <m:sty m:val="p"/>
+                      </m:rPr>
+                      <a:rPr lang="en-US" altLang="ja-JP" sz="2400" i="1" smtClean="0">
+                        <a:latin typeface="Cambria Math" panose="02040503050406030204" pitchFamily="18" charset="0"/>
+                      </a:rPr>
+                      <m:t>ω</m:t>
+                    </m:r>
+                    <m:r>
+                      <a:rPr lang="en-US" altLang="ja-JP" sz="2400">
+                        <a:latin typeface="Cambria Math" panose="02040503050406030204" pitchFamily="18" charset="0"/>
+                      </a:rPr>
+                      <m:t>)</m:t>
+                    </m:r>
+                  </m:oMath>
+                </a14:m>
+                <a:endParaRPr lang="en-US" altLang="ja-JP" sz="2400" dirty="0"/>
+              </a:p>
+              <a:p>
+                <a:endParaRPr lang="en-US" altLang="ja-JP" sz="2400" dirty="0"/>
+              </a:p>
+              <a:p>
+                <a:r>
+                  <a:rPr lang="ja-JP" altLang="en-US" sz="2400" dirty="0"/>
+                  <a:t>瞬間速度と同様に、接線上の速度なので</a:t>
+                </a:r>
+                <a14:m>
+                  <m:oMath xmlns:m="http://schemas.openxmlformats.org/officeDocument/2006/math">
+                    <m:r>
+                      <a:rPr lang="en-US" altLang="ja-JP" sz="2400" i="1" dirty="0" smtClean="0">
+                        <a:latin typeface="Cambria Math" panose="02040503050406030204" pitchFamily="18" charset="0"/>
+                      </a:rPr>
+                      <m:t>𝑡</m:t>
+                    </m:r>
+                  </m:oMath>
+                </a14:m>
+                <a:r>
+                  <a:rPr lang="ja-JP" altLang="en-US" sz="2400" dirty="0"/>
+                  <a:t>は</a:t>
+                </a:r>
+                <a:r>
+                  <a:rPr lang="en-US" altLang="ja-JP" sz="2400" dirty="0"/>
+                  <a:t>0</a:t>
+                </a:r>
+                <a:r>
+                  <a:rPr lang="ja-JP" altLang="en-US" sz="2400" dirty="0"/>
+                  <a:t>に極限に近づけるため、</a:t>
+                </a:r>
+                <a:endParaRPr lang="en-US" altLang="ja-JP" sz="2400" dirty="0"/>
+              </a:p>
+              <a:p>
+                <a14:m>
+                  <m:oMath xmlns:m="http://schemas.openxmlformats.org/officeDocument/2006/math">
+                    <m:r>
+                      <a:rPr lang="en-US" altLang="ja-JP" sz="2400" b="0" i="1" dirty="0" smtClean="0">
+                        <a:latin typeface="Cambria Math" panose="02040503050406030204" pitchFamily="18" charset="0"/>
+                      </a:rPr>
+                      <m:t>𝑣</m:t>
+                    </m:r>
+                    <m:r>
+                      <a:rPr lang="en-US" altLang="ja-JP" sz="2400" b="0" i="1" baseline="-25000" dirty="0" smtClean="0">
+                        <a:latin typeface="Cambria Math" panose="02040503050406030204" pitchFamily="18" charset="0"/>
+                      </a:rPr>
+                      <m:t>𝑡</m:t>
+                    </m:r>
+                    <m:r>
+                      <a:rPr lang="en-US" altLang="ja-JP" sz="2400" b="0" i="1" dirty="0" smtClean="0">
+                        <a:latin typeface="Cambria Math" panose="02040503050406030204" pitchFamily="18" charset="0"/>
+                      </a:rPr>
+                      <m:t>=</m:t>
+                    </m:r>
+                    <m:r>
+                      <m:rPr>
+                        <m:sty m:val="p"/>
+                      </m:rPr>
+                      <a:rPr lang="en-US" altLang="ja-JP" sz="2400" i="1" dirty="0">
+                        <a:latin typeface="Cambria Math" panose="02040503050406030204" pitchFamily="18" charset="0"/>
+                      </a:rPr>
+                      <m:t>ω</m:t>
+                    </m:r>
+                    <m:r>
+                      <a:rPr lang="en-US" altLang="ja-JP" sz="2400" b="0" i="1" dirty="0" smtClean="0">
+                        <a:latin typeface="Cambria Math" panose="02040503050406030204" pitchFamily="18" charset="0"/>
+                      </a:rPr>
+                      <m:t>𝑟</m:t>
+                    </m:r>
+                  </m:oMath>
+                </a14:m>
+                <a:r>
+                  <a:rPr lang="en-US" altLang="ja-JP" sz="2400" dirty="0"/>
+                  <a:t> </a:t>
+                </a:r>
+                <a:r>
+                  <a:rPr lang="ja-JP" altLang="en-US" sz="2400" dirty="0"/>
+                  <a:t>となる</a:t>
+                </a:r>
+                <a:endParaRPr lang="en-US" altLang="ja-JP" sz="2400" dirty="0"/>
+              </a:p>
+              <a:p>
+                <a:r>
+                  <a:rPr lang="en-US" altLang="ja-JP" sz="2400" dirty="0"/>
+                  <a:t>※</a:t>
+                </a:r>
+                <a:r>
+                  <a:rPr lang="ja-JP" altLang="en-US" sz="2400" dirty="0"/>
+                  <a:t>興味がある方は時間微分について調べてみよう</a:t>
+                </a:r>
+                <a:endParaRPr lang="en-US" altLang="ja-JP" sz="2400" dirty="0"/>
+              </a:p>
+            </p:txBody>
+          </p:sp>
+        </mc:Choice>
+        <mc:Fallback xmlns="">
+          <p:sp>
+            <p:nvSpPr>
+              <p:cNvPr id="6" name="テキスト ボックス 5">
+                <a:extLst>
+                  <a:ext uri="{FF2B5EF4-FFF2-40B4-BE49-F238E27FC236}">
+                    <a16:creationId xmlns:a16="http://schemas.microsoft.com/office/drawing/2014/main" id="{55830AD6-028B-4C4E-80BF-B70DFC1C3A46}"/>
+                  </a:ext>
+                </a:extLst>
+              </p:cNvPr>
+              <p:cNvSpPr txBox="1">
+                <a:spLocks noRot="1" noChangeAspect="1" noMove="1" noResize="1" noEditPoints="1" noAdjustHandles="1" noChangeArrowheads="1" noChangeShapeType="1" noTextEdit="1"/>
+              </p:cNvSpPr>
+              <p:nvPr/>
+            </p:nvSpPr>
+            <p:spPr>
+              <a:xfrm>
+                <a:off x="567542" y="1216429"/>
+                <a:ext cx="9718814" cy="5362943"/>
+              </a:xfrm>
+              <a:prstGeom prst="rect">
+                <a:avLst/>
+              </a:prstGeom>
+              <a:blipFill>
+                <a:blip r:embed="rId2"/>
+                <a:stretch>
+                  <a:fillRect l="-941" t="-910" r="-63" b="-1706"/>
+                </a:stretch>
+              </a:blipFill>
+            </p:spPr>
+            <p:txBody>
+              <a:bodyPr/>
+              <a:lstStyle/>
+              <a:p>
+                <a:r>
+                  <a:rPr lang="ja-JP" altLang="en-US">
+                    <a:noFill/>
+                  </a:rPr>
+                  <a:t> </a:t>
+                </a:r>
+              </a:p>
+            </p:txBody>
+          </p:sp>
+        </mc:Fallback>
+      </mc:AlternateContent>
+    </p:spTree>
+    <p:extLst>
+      <p:ext uri="{BB962C8B-B14F-4D97-AF65-F5344CB8AC3E}">
+        <p14:creationId xmlns:p14="http://schemas.microsoft.com/office/powerpoint/2010/main" val="2149491964"/>
+      </p:ext>
+    </p:extLst>
+  </p:cSld>
+  <p:clrMapOvr>
+    <a:masterClrMapping/>
+  </p:clrMapOvr>
+</p:sld>
+</file>
+
+<file path=ppt/slides/slide11.xml><?xml version="1.0" encoding="utf-8"?>
+<p:sld xmlns:a="http://schemas.openxmlformats.org/drawingml/2006/main" xmlns:r="http://schemas.openxmlformats.org/officeDocument/2006/relationships" xmlns:p="http://schemas.openxmlformats.org/presentationml/2006/main">
+  <p:cSld>
+    <p:spTree>
+      <p:nvGrpSpPr>
+        <p:cNvPr id="1" name=""/>
+        <p:cNvGrpSpPr/>
+        <p:nvPr/>
+      </p:nvGrpSpPr>
+      <p:grpSpPr>
+        <a:xfrm>
+          <a:off x="0" y="0"/>
+          <a:ext cx="0" cy="0"/>
+          <a:chOff x="0" y="0"/>
+          <a:chExt cx="0" cy="0"/>
+        </a:xfrm>
+      </p:grpSpPr>
+      <p:sp>
+        <p:nvSpPr>
+          <p:cNvPr id="4" name="テキスト ボックス 3">
+            <a:extLst>
+              <a:ext uri="{FF2B5EF4-FFF2-40B4-BE49-F238E27FC236}">
+                <a16:creationId xmlns:a16="http://schemas.microsoft.com/office/drawing/2014/main" id="{5A13BF46-B8C5-48AA-8308-C9ECFF431A18}"/>
+              </a:ext>
+            </a:extLst>
+          </p:cNvPr>
+          <p:cNvSpPr txBox="1"/>
+          <p:nvPr/>
+        </p:nvSpPr>
+        <p:spPr>
+          <a:xfrm>
+            <a:off x="567542" y="491954"/>
+            <a:ext cx="3174267" cy="584775"/>
+          </a:xfrm>
+          <a:prstGeom prst="rect">
+            <a:avLst/>
+          </a:prstGeom>
+          <a:noFill/>
+        </p:spPr>
+        <p:txBody>
+          <a:bodyPr wrap="none" rtlCol="0">
+            <a:spAutoFit/>
+          </a:bodyPr>
+          <a:lstStyle/>
+          <a:p>
+            <a:r>
+              <a:rPr lang="ja-JP" altLang="en-US" sz="3200" b="1" u="sng" dirty="0"/>
+              <a:t>接線加速度 補足</a:t>
+            </a:r>
+            <a:endParaRPr kumimoji="1" lang="en-US" altLang="ja-JP" sz="3200" b="1" u="sng" dirty="0"/>
+          </a:p>
+        </p:txBody>
+      </p:sp>
+      <mc:AlternateContent xmlns:mc="http://schemas.openxmlformats.org/markup-compatibility/2006" xmlns:a14="http://schemas.microsoft.com/office/drawing/2010/main">
+        <mc:Choice Requires="a14">
+          <p:sp>
+            <p:nvSpPr>
+              <p:cNvPr id="6" name="テキスト ボックス 5">
+                <a:extLst>
+                  <a:ext uri="{FF2B5EF4-FFF2-40B4-BE49-F238E27FC236}">
+                    <a16:creationId xmlns:a16="http://schemas.microsoft.com/office/drawing/2014/main" id="{55830AD6-028B-4C4E-80BF-B70DFC1C3A46}"/>
+                  </a:ext>
+                </a:extLst>
+              </p:cNvPr>
+              <p:cNvSpPr txBox="1"/>
+              <p:nvPr/>
+            </p:nvSpPr>
+            <p:spPr>
+              <a:xfrm>
+                <a:off x="567542" y="1216429"/>
                 <a:ext cx="10334368" cy="3791744"/>
               </a:xfrm>
               <a:prstGeom prst="rect">
@@ -8367,304 +8946,124 @@
           </a:p>
         </p:txBody>
       </p:sp>
-      <mc:AlternateContent xmlns:mc="http://schemas.openxmlformats.org/markup-compatibility/2006" xmlns:a14="http://schemas.microsoft.com/office/drawing/2010/main">
-        <mc:Choice Requires="a14">
-          <p:sp>
-            <p:nvSpPr>
-              <p:cNvPr id="6" name="テキスト ボックス 5">
-                <a:extLst>
-                  <a:ext uri="{FF2B5EF4-FFF2-40B4-BE49-F238E27FC236}">
-                    <a16:creationId xmlns:a16="http://schemas.microsoft.com/office/drawing/2014/main" id="{55830AD6-028B-4C4E-80BF-B70DFC1C3A46}"/>
-                  </a:ext>
-                </a:extLst>
-              </p:cNvPr>
-              <p:cNvSpPr txBox="1"/>
-              <p:nvPr/>
-            </p:nvSpPr>
-            <p:spPr>
-              <a:xfrm>
-                <a:off x="567542" y="1216429"/>
-                <a:ext cx="7290970" cy="4033476"/>
-              </a:xfrm>
-              <a:prstGeom prst="rect">
-                <a:avLst/>
-              </a:prstGeom>
-              <a:noFill/>
-            </p:spPr>
-            <p:txBody>
-              <a:bodyPr wrap="none" rtlCol="0">
-                <a:spAutoFit/>
-              </a:bodyPr>
-              <a:lstStyle/>
-              <a:p>
-                <a:r>
-                  <a:rPr lang="ja-JP" altLang="en-US" sz="2400" dirty="0"/>
-                  <a:t>■なぜラジアンは単位に含まれないの？</a:t>
-                </a:r>
-                <a:endParaRPr lang="en-US" altLang="ja-JP" sz="2400" dirty="0"/>
-              </a:p>
-              <a:p>
-                <a:r>
-                  <a:rPr lang="ja-JP" altLang="en-US" sz="2400" dirty="0"/>
-                  <a:t>変位角の定義は、</a:t>
-                </a:r>
-                <a:endParaRPr lang="en-US" altLang="ja-JP" sz="2400" dirty="0"/>
-              </a:p>
-              <a:p>
-                <a14:m>
-                  <m:oMath xmlns:m="http://schemas.openxmlformats.org/officeDocument/2006/math">
-                    <m:r>
-                      <m:rPr>
-                        <m:sty m:val="p"/>
-                      </m:rPr>
-                      <a:rPr lang="en-US" altLang="ja-JP" sz="2400" i="1" dirty="0">
-                        <a:latin typeface="Cambria Math" panose="02040503050406030204" pitchFamily="18" charset="0"/>
-                      </a:rPr>
-                      <m:t>θ</m:t>
-                    </m:r>
-                    <m:r>
-                      <a:rPr lang="en-US" altLang="ja-JP" sz="2400" b="0" i="1" dirty="0" smtClean="0">
-                        <a:latin typeface="Cambria Math" panose="02040503050406030204" pitchFamily="18" charset="0"/>
-                      </a:rPr>
-                      <m:t>=</m:t>
-                    </m:r>
-                    <m:f>
-                      <m:fPr>
-                        <m:ctrlPr>
-                          <a:rPr lang="en-US" altLang="ja-JP" sz="2400" b="0" i="1" dirty="0" smtClean="0">
-                            <a:latin typeface="Cambria Math" panose="02040503050406030204" pitchFamily="18" charset="0"/>
-                          </a:rPr>
-                        </m:ctrlPr>
-                      </m:fPr>
-                      <m:num>
-                        <m:r>
-                          <a:rPr lang="en-US" altLang="ja-JP" sz="2400" b="0" i="1" dirty="0" smtClean="0">
-                            <a:latin typeface="Cambria Math" panose="02040503050406030204" pitchFamily="18" charset="0"/>
-                          </a:rPr>
-                          <m:t>𝑠</m:t>
-                        </m:r>
-                      </m:num>
-                      <m:den>
-                        <m:r>
-                          <a:rPr lang="en-US" altLang="ja-JP" sz="2400" b="0" i="1" dirty="0" smtClean="0">
-                            <a:latin typeface="Cambria Math" panose="02040503050406030204" pitchFamily="18" charset="0"/>
-                          </a:rPr>
-                          <m:t>𝑟</m:t>
-                        </m:r>
-                      </m:den>
-                    </m:f>
-                  </m:oMath>
-                </a14:m>
-                <a:r>
-                  <a:rPr lang="en-US" altLang="ja-JP" sz="2400" dirty="0"/>
-                  <a:t> </a:t>
-                </a:r>
-              </a:p>
-              <a:p>
-                <a:endParaRPr lang="en-US" altLang="ja-JP" sz="2400" dirty="0"/>
-              </a:p>
-              <a:p>
-                <a14:m>
-                  <m:oMath xmlns:m="http://schemas.openxmlformats.org/officeDocument/2006/math">
-                    <m:r>
-                      <a:rPr lang="en-US" altLang="ja-JP" sz="2400" b="0" i="1" dirty="0" smtClean="0">
-                        <a:latin typeface="Cambria Math" panose="02040503050406030204" pitchFamily="18" charset="0"/>
-                      </a:rPr>
-                      <m:t>𝑠</m:t>
-                    </m:r>
-                  </m:oMath>
-                </a14:m>
-                <a:r>
-                  <a:rPr lang="en-US" altLang="ja-JP" sz="2400" dirty="0"/>
-                  <a:t> </a:t>
-                </a:r>
-                <a:r>
-                  <a:rPr lang="ja-JP" altLang="en-US" sz="2400" dirty="0"/>
-                  <a:t>も </a:t>
-                </a:r>
-                <a14:m>
-                  <m:oMath xmlns:m="http://schemas.openxmlformats.org/officeDocument/2006/math">
-                    <m:r>
-                      <a:rPr lang="en-US" altLang="ja-JP" sz="2400" i="1" dirty="0">
-                        <a:latin typeface="Cambria Math" panose="02040503050406030204" pitchFamily="18" charset="0"/>
-                      </a:rPr>
-                      <m:t>𝑟</m:t>
-                    </m:r>
-                  </m:oMath>
-                </a14:m>
-                <a:r>
-                  <a:rPr lang="en-US" altLang="ja-JP" sz="2400" dirty="0"/>
-                  <a:t> </a:t>
-                </a:r>
-                <a:r>
-                  <a:rPr lang="ja-JP" altLang="en-US" sz="2400" dirty="0"/>
-                  <a:t>も長さなので単位は</a:t>
-                </a:r>
-                <a:r>
-                  <a:rPr lang="en-US" altLang="ja-JP" sz="2400" dirty="0"/>
-                  <a:t>m</a:t>
-                </a:r>
-                <a:r>
-                  <a:rPr lang="ja-JP" altLang="en-US" sz="2400" dirty="0"/>
-                  <a:t>や</a:t>
-                </a:r>
-                <a:r>
-                  <a:rPr lang="en-US" altLang="ja-JP" sz="2400" dirty="0"/>
-                  <a:t>km</a:t>
-                </a:r>
-                <a:r>
-                  <a:rPr lang="ja-JP" altLang="en-US" sz="2400" dirty="0"/>
-                  <a:t>になる。つまり、</a:t>
-                </a:r>
-                <a:endParaRPr lang="en-US" altLang="ja-JP" sz="2400" dirty="0"/>
-              </a:p>
-              <a:p>
-                <a14:m>
-                  <m:oMath xmlns:m="http://schemas.openxmlformats.org/officeDocument/2006/math">
-                    <m:r>
-                      <m:rPr>
-                        <m:sty m:val="p"/>
-                      </m:rPr>
-                      <a:rPr lang="en-US" altLang="ja-JP" sz="2400" i="1" dirty="0" smtClean="0">
-                        <a:latin typeface="Cambria Math" panose="02040503050406030204" pitchFamily="18" charset="0"/>
-                      </a:rPr>
-                      <m:t>θ</m:t>
-                    </m:r>
-                    <m:r>
-                      <a:rPr lang="en-US" altLang="ja-JP" sz="2400" b="0" i="1" dirty="0" smtClean="0">
-                        <a:latin typeface="Cambria Math" panose="02040503050406030204" pitchFamily="18" charset="0"/>
-                      </a:rPr>
-                      <m:t>=</m:t>
-                    </m:r>
-                    <m:f>
-                      <m:fPr>
-                        <m:ctrlPr>
-                          <a:rPr lang="en-US" altLang="ja-JP" sz="2400" b="0" i="1" dirty="0" smtClean="0">
-                            <a:latin typeface="Cambria Math" panose="02040503050406030204" pitchFamily="18" charset="0"/>
-                          </a:rPr>
-                        </m:ctrlPr>
-                      </m:fPr>
-                      <m:num>
-                        <m:r>
-                          <a:rPr lang="en-US" altLang="ja-JP" sz="2400" b="0" i="1" dirty="0" smtClean="0">
-                            <a:latin typeface="Cambria Math" panose="02040503050406030204" pitchFamily="18" charset="0"/>
-                          </a:rPr>
-                          <m:t>𝑚</m:t>
-                        </m:r>
-                      </m:num>
-                      <m:den>
-                        <m:r>
-                          <a:rPr lang="en-US" altLang="ja-JP" sz="2400" b="0" i="1" dirty="0" smtClean="0">
-                            <a:latin typeface="Cambria Math" panose="02040503050406030204" pitchFamily="18" charset="0"/>
-                          </a:rPr>
-                          <m:t>𝑚</m:t>
-                        </m:r>
-                      </m:den>
-                    </m:f>
-                    <m:r>
-                      <a:rPr lang="en-US" altLang="ja-JP" sz="2400" b="0" i="1" dirty="0" smtClean="0">
-                        <a:latin typeface="Cambria Math" panose="02040503050406030204" pitchFamily="18" charset="0"/>
-                      </a:rPr>
-                      <m:t>=1</m:t>
-                    </m:r>
-                  </m:oMath>
-                </a14:m>
-                <a:r>
-                  <a:rPr lang="en-US" altLang="ja-JP" sz="2400" dirty="0"/>
-                  <a:t> </a:t>
-                </a:r>
-                <a:r>
-                  <a:rPr lang="ja-JP" altLang="en-US" sz="2400" dirty="0"/>
-                  <a:t>となり単位がなくなる。</a:t>
-                </a:r>
-                <a:endParaRPr lang="en-US" altLang="ja-JP" sz="2400" dirty="0"/>
-              </a:p>
-              <a:p>
-                <a:r>
-                  <a:rPr lang="ja-JP" altLang="en-US" sz="2400" dirty="0"/>
-                  <a:t>よって変位角の単位は無し</a:t>
-                </a:r>
-                <a:endParaRPr lang="en-US" altLang="ja-JP" sz="2400" dirty="0"/>
-              </a:p>
-              <a:p>
-                <a:endParaRPr lang="en-US" altLang="ja-JP" sz="2400" dirty="0"/>
-              </a:p>
-              <a:p>
-                <a:r>
-                  <a:rPr lang="ja-JP" altLang="en-US" sz="2400" dirty="0"/>
-                  <a:t>ここではわかりやすく</a:t>
-                </a:r>
-                <a14:m>
-                  <m:oMath xmlns:m="http://schemas.openxmlformats.org/officeDocument/2006/math">
-                    <m:r>
-                      <a:rPr lang="en-US" altLang="ja-JP" sz="2400" i="1" dirty="0" smtClean="0">
-                        <a:latin typeface="Cambria Math" panose="02040503050406030204" pitchFamily="18" charset="0"/>
-                      </a:rPr>
-                      <m:t>𝑟𝑎𝑑</m:t>
-                    </m:r>
-                  </m:oMath>
-                </a14:m>
-                <a:r>
-                  <a:rPr lang="ja-JP" altLang="en-US" sz="2400" dirty="0"/>
-                  <a:t>と書いてるだけです。</a:t>
-                </a:r>
-                <a:endParaRPr lang="en-US" altLang="ja-JP" sz="2400" dirty="0"/>
-              </a:p>
-              <a:p>
-                <a:r>
-                  <a:rPr lang="ja-JP" altLang="en-US" sz="2400" dirty="0"/>
-                  <a:t>一般的にも使用されています。</a:t>
-                </a:r>
-                <a:endParaRPr lang="en-US" altLang="ja-JP" sz="2400" dirty="0"/>
-              </a:p>
-            </p:txBody>
-          </p:sp>
-        </mc:Choice>
-        <mc:Fallback xmlns="">
-          <p:sp>
-            <p:nvSpPr>
-              <p:cNvPr id="6" name="テキスト ボックス 5">
-                <a:extLst>
-                  <a:ext uri="{FF2B5EF4-FFF2-40B4-BE49-F238E27FC236}">
-                    <a16:creationId xmlns:a16="http://schemas.microsoft.com/office/drawing/2014/main" id="{55830AD6-028B-4C4E-80BF-B70DFC1C3A46}"/>
-                  </a:ext>
-                </a:extLst>
-              </p:cNvPr>
-              <p:cNvSpPr txBox="1">
-                <a:spLocks noRot="1" noChangeAspect="1" noMove="1" noResize="1" noEditPoints="1" noAdjustHandles="1" noChangeArrowheads="1" noChangeShapeType="1" noTextEdit="1"/>
-              </p:cNvSpPr>
-              <p:nvPr/>
-            </p:nvSpPr>
-            <p:spPr>
-              <a:xfrm>
-                <a:off x="567542" y="1216429"/>
-                <a:ext cx="7290970" cy="4033476"/>
-              </a:xfrm>
-              <a:prstGeom prst="rect">
-                <a:avLst/>
-              </a:prstGeom>
-              <a:blipFill>
-                <a:blip r:embed="rId2"/>
-                <a:stretch>
-                  <a:fillRect l="-1254" t="-1210" r="-334" b="-2572"/>
-                </a:stretch>
-              </a:blipFill>
-            </p:spPr>
-            <p:txBody>
-              <a:bodyPr/>
-              <a:lstStyle/>
-              <a:p>
-                <a:r>
-                  <a:rPr lang="ja-JP" altLang="en-US">
-                    <a:noFill/>
-                  </a:rPr>
-                  <a:t> </a:t>
-                </a:r>
-              </a:p>
-            </p:txBody>
-          </p:sp>
-        </mc:Fallback>
-      </mc:AlternateContent>
+      <p:sp>
+        <p:nvSpPr>
+          <p:cNvPr id="6" name="テキスト ボックス 5">
+            <a:extLst>
+              <a:ext uri="{FF2B5EF4-FFF2-40B4-BE49-F238E27FC236}">
+                <a16:creationId xmlns:a16="http://schemas.microsoft.com/office/drawing/2014/main" id="{55830AD6-028B-4C4E-80BF-B70DFC1C3A46}"/>
+              </a:ext>
+            </a:extLst>
+          </p:cNvPr>
+          <p:cNvSpPr txBox="1"/>
+          <p:nvPr/>
+        </p:nvSpPr>
+        <p:spPr>
+          <a:xfrm>
+            <a:off x="567542" y="1216429"/>
+            <a:ext cx="9110186" cy="4154984"/>
+          </a:xfrm>
+          <a:prstGeom prst="rect">
+            <a:avLst/>
+          </a:prstGeom>
+          <a:noFill/>
+        </p:spPr>
+        <p:txBody>
+          <a:bodyPr wrap="none" rtlCol="0">
+            <a:spAutoFit/>
+          </a:bodyPr>
+          <a:lstStyle/>
+          <a:p>
+            <a:r>
+              <a:rPr lang="ja-JP" altLang="en-US" sz="2400" dirty="0"/>
+              <a:t>接線速度はもともとの移動速度（並進速度）に影響を与えます。</a:t>
+            </a:r>
+            <a:endParaRPr lang="en-US" altLang="ja-JP" sz="2400" dirty="0"/>
+          </a:p>
+          <a:p>
+            <a:r>
+              <a:rPr lang="ja-JP" altLang="en-US" sz="2400" dirty="0"/>
+              <a:t>その際の計算はシンプルです。</a:t>
+            </a:r>
+            <a:endParaRPr lang="en-US" altLang="ja-JP" sz="2400" dirty="0"/>
+          </a:p>
+          <a:p>
+            <a:endParaRPr lang="en-US" altLang="ja-JP" sz="2400" dirty="0"/>
+          </a:p>
+          <a:p>
+            <a:r>
+              <a:rPr lang="ja-JP" altLang="en-US" sz="2400" b="1" dirty="0">
+                <a:solidFill>
+                  <a:srgbClr val="FF0000"/>
+                </a:solidFill>
+              </a:rPr>
+              <a:t>■最終的な速度の計算</a:t>
+            </a:r>
+            <a:endParaRPr lang="en-US" altLang="ja-JP" sz="2400" b="1" dirty="0">
+              <a:solidFill>
+                <a:srgbClr val="FF0000"/>
+              </a:solidFill>
+            </a:endParaRPr>
+          </a:p>
+          <a:p>
+            <a:r>
+              <a:rPr lang="ja-JP" altLang="en-US" sz="2400" b="1" dirty="0"/>
+              <a:t>最終的な速度＝並進速度</a:t>
+            </a:r>
+            <a:r>
+              <a:rPr lang="en-US" altLang="ja-JP" sz="2400" b="1" dirty="0"/>
+              <a:t>±</a:t>
+            </a:r>
+            <a:r>
+              <a:rPr lang="ja-JP" altLang="en-US" sz="2400" b="1" dirty="0"/>
+              <a:t>接線速度</a:t>
+            </a:r>
+            <a:endParaRPr lang="en-US" altLang="ja-JP" sz="2400" b="1" dirty="0"/>
+          </a:p>
+          <a:p>
+            <a:r>
+              <a:rPr lang="en-US" altLang="ja-JP" sz="2400" dirty="0"/>
+              <a:t>※</a:t>
+            </a:r>
+            <a:r>
+              <a:rPr lang="ja-JP" altLang="en-US" sz="2400" dirty="0"/>
+              <a:t>回転の向きによりプラスかマイナスかになる</a:t>
+            </a:r>
+            <a:endParaRPr lang="en-US" altLang="ja-JP" sz="2400" dirty="0"/>
+          </a:p>
+          <a:p>
+            <a:endParaRPr lang="en-US" altLang="ja-JP" sz="2400" dirty="0"/>
+          </a:p>
+          <a:p>
+            <a:r>
+              <a:rPr lang="ja-JP" altLang="en-US" sz="2400" dirty="0"/>
+              <a:t>球体のものを手で回転させると、円を描くように移動します。</a:t>
+            </a:r>
+            <a:endParaRPr lang="en-US" altLang="ja-JP" sz="2400" dirty="0"/>
+          </a:p>
+          <a:p>
+            <a:r>
+              <a:rPr lang="ja-JP" altLang="en-US" sz="2400" dirty="0"/>
+              <a:t>これは接線速度が地面に設置して影響を与えています。</a:t>
+            </a:r>
+            <a:endParaRPr lang="en-US" altLang="ja-JP" sz="2400" dirty="0"/>
+          </a:p>
+          <a:p>
+            <a:endParaRPr lang="en-US" altLang="ja-JP" sz="2400" dirty="0"/>
+          </a:p>
+          <a:p>
+            <a:r>
+              <a:rPr lang="en-US" altLang="ja-JP" sz="2400" dirty="0"/>
+              <a:t>※</a:t>
+            </a:r>
+            <a:r>
+              <a:rPr lang="ja-JP" altLang="en-US" sz="2400" dirty="0"/>
+              <a:t>ベイブレードの動きとかもこれ</a:t>
+            </a:r>
+            <a:endParaRPr lang="en-US" altLang="ja-JP" sz="2400" dirty="0"/>
+          </a:p>
+        </p:txBody>
+      </p:sp>
     </p:spTree>
     <p:extLst>
       <p:ext uri="{BB962C8B-B14F-4D97-AF65-F5344CB8AC3E}">
@@ -8731,8 +9130,8 @@
           </a:p>
         </p:txBody>
       </p:sp>
-      <mc:AlternateContent xmlns:mc="http://schemas.openxmlformats.org/markup-compatibility/2006" xmlns:a14="http://schemas.microsoft.com/office/drawing/2010/main">
-        <mc:Choice Requires="a14">
+      <mc:AlternateContent xmlns:mc="http://schemas.openxmlformats.org/markup-compatibility/2006">
+        <mc:Choice xmlns:a14="http://schemas.microsoft.com/office/drawing/2010/main" Requires="a14">
           <p:sp>
             <p:nvSpPr>
               <p:cNvPr id="6" name="テキスト ボックス 5">
@@ -8748,7 +9147,7 @@
             <p:spPr>
               <a:xfrm>
                 <a:off x="567542" y="1216429"/>
-                <a:ext cx="9718814" cy="5362943"/>
+                <a:ext cx="7290970" cy="4033476"/>
               </a:xfrm>
               <a:prstGeom prst="rect">
                 <a:avLst/>
@@ -8763,38 +9162,20 @@
               <a:p>
                 <a:r>
                   <a:rPr lang="ja-JP" altLang="en-US" sz="2400" dirty="0"/>
-                  <a:t>■接線速度の成り立ち</a:t>
+                  <a:t>ラジアンの単位が計算に含まれないのは、</a:t>
                 </a:r>
                 <a:endParaRPr lang="en-US" altLang="ja-JP" sz="2400" dirty="0"/>
               </a:p>
               <a:p>
                 <a:r>
                   <a:rPr lang="ja-JP" altLang="en-US" sz="2400" dirty="0"/>
-                  <a:t>変位角の定義を、弧の長さを求める式に変形すると、</a:t>
+                  <a:t>変位角の定義は、</a:t>
                 </a:r>
                 <a:endParaRPr lang="en-US" altLang="ja-JP" sz="2400" dirty="0"/>
               </a:p>
               <a:p>
                 <a14:m>
                   <m:oMath xmlns:m="http://schemas.openxmlformats.org/officeDocument/2006/math">
-                    <m:r>
-                      <a:rPr lang="en-US" altLang="ja-JP" sz="2400" b="0" i="1" dirty="0" smtClean="0">
-                        <a:latin typeface="Cambria Math" panose="02040503050406030204" pitchFamily="18" charset="0"/>
-                      </a:rPr>
-                      <m:t>𝑠</m:t>
-                    </m:r>
-                    <m:r>
-                      <a:rPr lang="en-US" altLang="ja-JP" sz="2400" b="0" i="1" dirty="0" smtClean="0">
-                        <a:latin typeface="Cambria Math" panose="02040503050406030204" pitchFamily="18" charset="0"/>
-                      </a:rPr>
-                      <m:t>=</m:t>
-                    </m:r>
-                    <m:r>
-                      <a:rPr lang="en-US" altLang="ja-JP" sz="2400" b="0" i="1" dirty="0" smtClean="0">
-                        <a:latin typeface="Cambria Math" panose="02040503050406030204" pitchFamily="18" charset="0"/>
-                      </a:rPr>
-                      <m:t>𝑟</m:t>
-                    </m:r>
                     <m:r>
                       <m:rPr>
                         <m:sty m:val="p"/>
@@ -8804,40 +9185,12 @@
                       </a:rPr>
                       <m:t>θ</m:t>
                     </m:r>
-                  </m:oMath>
-                </a14:m>
-                <a:r>
-                  <a:rPr lang="en-US" altLang="ja-JP" sz="2400" dirty="0"/>
-                  <a:t> </a:t>
-                </a:r>
-              </a:p>
-              <a:p>
-                <a:endParaRPr lang="en-US" altLang="ja-JP" sz="2400" dirty="0"/>
-              </a:p>
-              <a:p>
-                <a:r>
-                  <a:rPr lang="ja-JP" altLang="en-US" sz="2400" dirty="0"/>
-                  <a:t>両辺を時間 </a:t>
-                </a:r>
-                <a14:m>
-                  <m:oMath xmlns:m="http://schemas.openxmlformats.org/officeDocument/2006/math">
-                    <m:r>
-                      <a:rPr lang="en-US" altLang="ja-JP" sz="2400" i="1" dirty="0" smtClean="0">
-                        <a:latin typeface="Cambria Math" panose="02040503050406030204" pitchFamily="18" charset="0"/>
-                      </a:rPr>
-                      <m:t>𝑡</m:t>
-                    </m:r>
-                  </m:oMath>
-                </a14:m>
-                <a:r>
-                  <a:rPr lang="ja-JP" altLang="en-US" sz="2400" dirty="0"/>
-                  <a:t> で割ると、</a:t>
-                </a:r>
-                <a:endParaRPr lang="en-US" altLang="ja-JP" sz="2400" dirty="0"/>
-              </a:p>
-              <a:p>
-                <a14:m>
-                  <m:oMath xmlns:m="http://schemas.openxmlformats.org/officeDocument/2006/math">
+                    <m:r>
+                      <a:rPr lang="en-US" altLang="ja-JP" sz="2400" b="0" i="1" dirty="0" smtClean="0">
+                        <a:latin typeface="Cambria Math" panose="02040503050406030204" pitchFamily="18" charset="0"/>
+                      </a:rPr>
+                      <m:t>=</m:t>
+                    </m:r>
                     <m:f>
                       <m:fPr>
                         <m:ctrlPr>
@@ -8859,47 +9212,7 @@
                           <a:rPr lang="en-US" altLang="ja-JP" sz="2400" b="0" i="1" dirty="0" smtClean="0">
                             <a:latin typeface="Cambria Math" panose="02040503050406030204" pitchFamily="18" charset="0"/>
                           </a:rPr>
-                          <m:t>𝑡</m:t>
-                        </m:r>
-                      </m:den>
-                    </m:f>
-                    <m:r>
-                      <a:rPr lang="en-US" altLang="ja-JP" sz="2400" b="0" i="1" dirty="0" smtClean="0">
-                        <a:latin typeface="Cambria Math" panose="02040503050406030204" pitchFamily="18" charset="0"/>
-                      </a:rPr>
-                      <m:t>=</m:t>
-                    </m:r>
-                    <m:r>
-                      <a:rPr lang="en-US" altLang="ja-JP" sz="2400" b="0" i="1" dirty="0" smtClean="0">
-                        <a:latin typeface="Cambria Math" panose="02040503050406030204" pitchFamily="18" charset="0"/>
-                      </a:rPr>
-                      <m:t>𝑟</m:t>
-                    </m:r>
-                    <m:f>
-                      <m:fPr>
-                        <m:ctrlPr>
-                          <a:rPr lang="en-US" altLang="ja-JP" sz="2400" b="0" i="1" dirty="0" smtClean="0">
-                            <a:latin typeface="Cambria Math" panose="02040503050406030204" pitchFamily="18" charset="0"/>
-                          </a:rPr>
-                        </m:ctrlPr>
-                      </m:fPr>
-                      <m:num>
-                        <m:r>
-                          <m:rPr>
-                            <m:sty m:val="p"/>
-                          </m:rPr>
-                          <a:rPr lang="en-US" altLang="ja-JP" sz="2400" i="1" dirty="0">
-                            <a:latin typeface="Cambria Math" panose="02040503050406030204" pitchFamily="18" charset="0"/>
-                          </a:rPr>
-                          <m:t>θ</m:t>
-                        </m:r>
-                      </m:num>
-                      <m:den>
-                        <m:r>
-                          <a:rPr lang="en-US" altLang="ja-JP" sz="2400" b="0" i="1" dirty="0" smtClean="0">
-                            <a:latin typeface="Cambria Math" panose="02040503050406030204" pitchFamily="18" charset="0"/>
-                          </a:rPr>
-                          <m:t>𝑡</m:t>
+                          <m:t>𝑟</m:t>
                         </m:r>
                       </m:den>
                     </m:f>
@@ -8916,6 +9229,76 @@
               <a:p>
                 <a14:m>
                   <m:oMath xmlns:m="http://schemas.openxmlformats.org/officeDocument/2006/math">
+                    <m:r>
+                      <a:rPr lang="en-US" altLang="ja-JP" sz="2400" b="0" i="1" dirty="0" smtClean="0">
+                        <a:latin typeface="Cambria Math" panose="02040503050406030204" pitchFamily="18" charset="0"/>
+                      </a:rPr>
+                      <m:t>𝑠</m:t>
+                    </m:r>
+                  </m:oMath>
+                </a14:m>
+                <a:r>
+                  <a:rPr lang="en-US" altLang="ja-JP" sz="2400" dirty="0"/>
+                  <a:t> </a:t>
+                </a:r>
+                <a:r>
+                  <a:rPr lang="ja-JP" altLang="en-US" sz="2400" dirty="0"/>
+                  <a:t>も </a:t>
+                </a:r>
+                <a14:m>
+                  <m:oMath xmlns:m="http://schemas.openxmlformats.org/officeDocument/2006/math">
+                    <m:r>
+                      <a:rPr lang="en-US" altLang="ja-JP" sz="2400" i="1" dirty="0">
+                        <a:latin typeface="Cambria Math" panose="02040503050406030204" pitchFamily="18" charset="0"/>
+                      </a:rPr>
+                      <m:t>𝑟</m:t>
+                    </m:r>
+                  </m:oMath>
+                </a14:m>
+                <a:r>
+                  <a:rPr lang="en-US" altLang="ja-JP" sz="2400" dirty="0"/>
+                  <a:t> </a:t>
+                </a:r>
+                <a:r>
+                  <a:rPr lang="ja-JP" altLang="en-US" sz="2400" dirty="0"/>
+                  <a:t>も長さなので単位は</a:t>
+                </a:r>
+                <a:r>
+                  <a:rPr lang="en-US" altLang="ja-JP" sz="2400" dirty="0"/>
+                  <a:t>m</a:t>
+                </a:r>
+                <a:r>
+                  <a:rPr lang="ja-JP" altLang="en-US" sz="2400" dirty="0"/>
+                  <a:t>や</a:t>
+                </a:r>
+                <a:r>
+                  <a:rPr lang="en-US" altLang="ja-JP" sz="2400" dirty="0"/>
+                  <a:t>km</a:t>
+                </a:r>
+                <a:r>
+                  <a:rPr lang="ja-JP" altLang="en-US" sz="2400" dirty="0"/>
+                  <a:t>になる。つまり、</a:t>
+                </a:r>
+                <a:endParaRPr lang="en-US" altLang="ja-JP" sz="2400" dirty="0"/>
+              </a:p>
+              <a:p>
+                <a14:m>
+                  <m:oMath xmlns:m="http://schemas.openxmlformats.org/officeDocument/2006/math">
+                    <m:r>
+                      <m:rPr>
+                        <m:sty m:val="p"/>
+                      </m:rPr>
+                      <a:rPr lang="en-US" altLang="ja-JP" sz="2400" i="1" dirty="0" smtClean="0">
+                        <a:latin typeface="Cambria Math" panose="02040503050406030204" pitchFamily="18" charset="0"/>
+                      </a:rPr>
+                      <m:t>θ</m:t>
+                    </m:r>
+                    <m:r>
+                      <a:rPr lang="en-US" altLang="ja-JP" sz="2400" b="0" i="1" dirty="0" smtClean="0">
+                        <a:latin typeface="Cambria Math" panose="02040503050406030204" pitchFamily="18" charset="0"/>
+                      </a:rPr>
+                      <m:t>=</m:t>
+                    </m:r>
                     <m:f>
                       <m:fPr>
                         <m:ctrlPr>
@@ -8929,7 +9312,7 @@
                           <a:rPr lang="en-US" altLang="ja-JP" sz="2400" b="0" i="1" dirty="0" smtClean="0">
                             <a:latin typeface="Cambria Math" panose="02040503050406030204" pitchFamily="18" charset="0"/>
                           </a:rPr>
-                          <m:t>𝑠</m:t>
+                          <m:t>𝑚</m:t>
                         </m:r>
                       </m:num>
                       <m:den>
@@ -8937,268 +9320,70 @@
                           <a:rPr lang="en-US" altLang="ja-JP" sz="2400" b="0" i="1" dirty="0" smtClean="0">
                             <a:latin typeface="Cambria Math" panose="02040503050406030204" pitchFamily="18" charset="0"/>
                           </a:rPr>
-                          <m:t>𝑡</m:t>
+                          <m:t>𝑚</m:t>
                         </m:r>
                       </m:den>
                     </m:f>
+                    <m:r>
+                      <a:rPr lang="en-US" altLang="ja-JP" sz="2400" b="0" i="1" dirty="0" smtClean="0">
+                        <a:latin typeface="Cambria Math" panose="02040503050406030204" pitchFamily="18" charset="0"/>
+                      </a:rPr>
+                      <m:t>=1</m:t>
+                    </m:r>
                   </m:oMath>
                 </a14:m>
                 <a:r>
+                  <a:rPr lang="en-US" altLang="ja-JP" sz="2400" dirty="0"/>
+                  <a:t> </a:t>
+                </a:r>
+                <a:r>
                   <a:rPr lang="ja-JP" altLang="en-US" sz="2400" dirty="0"/>
-                  <a:t> は弧の長さを時間で割ったもの、つまり速度である</a:t>
+                  <a:t>となり単位がなくなる。</a:t>
+                </a:r>
+                <a:endParaRPr lang="en-US" altLang="ja-JP" sz="2400" dirty="0"/>
+              </a:p>
+              <a:p>
+                <a:r>
+                  <a:rPr lang="ja-JP" altLang="en-US" sz="2400" dirty="0"/>
+                  <a:t>よって変位角の単位は無し</a:t>
+                </a:r>
+                <a:endParaRPr lang="en-US" altLang="ja-JP" sz="2400" dirty="0"/>
+              </a:p>
+              <a:p>
+                <a:endParaRPr lang="en-US" altLang="ja-JP" sz="2400" dirty="0"/>
+              </a:p>
+              <a:p>
+                <a:r>
+                  <a:rPr lang="ja-JP" altLang="en-US" sz="2400" dirty="0"/>
+                  <a:t>ここではわかりやすく</a:t>
                 </a:r>
                 <a14:m>
                   <m:oMath xmlns:m="http://schemas.openxmlformats.org/officeDocument/2006/math">
                     <m:r>
-                      <a:rPr lang="en-US" altLang="ja-JP" sz="2400" b="0" i="0" smtClean="0">
-                        <a:latin typeface="Cambria Math" panose="02040503050406030204" pitchFamily="18" charset="0"/>
-                      </a:rPr>
-                      <m:t>(</m:t>
-                    </m:r>
-                    <m:f>
-                      <m:fPr>
-                        <m:ctrlPr>
-                          <a:rPr lang="en-US" altLang="ja-JP" sz="2400" i="1" dirty="0">
-                            <a:latin typeface="Cambria Math" panose="02040503050406030204" pitchFamily="18" charset="0"/>
-                          </a:rPr>
-                        </m:ctrlPr>
-                      </m:fPr>
-                      <m:num>
-                        <m:r>
-                          <a:rPr lang="en-US" altLang="ja-JP" sz="2400" i="1" dirty="0">
-                            <a:latin typeface="Cambria Math" panose="02040503050406030204" pitchFamily="18" charset="0"/>
-                          </a:rPr>
-                          <m:t>𝑠</m:t>
-                        </m:r>
-                      </m:num>
-                      <m:den>
-                        <m:r>
-                          <a:rPr lang="en-US" altLang="ja-JP" sz="2400" i="1" dirty="0">
-                            <a:latin typeface="Cambria Math" panose="02040503050406030204" pitchFamily="18" charset="0"/>
-                          </a:rPr>
-                          <m:t>𝑡</m:t>
-                        </m:r>
-                      </m:den>
-                    </m:f>
-                    <m:r>
-                      <a:rPr lang="en-US" altLang="ja-JP" sz="2400" b="0" i="1" dirty="0" smtClean="0">
-                        <a:latin typeface="Cambria Math" panose="02040503050406030204" pitchFamily="18" charset="0"/>
-                      </a:rPr>
-                      <m:t>=</m:t>
-                    </m:r>
-                    <m:r>
-                      <a:rPr lang="en-US" altLang="ja-JP" sz="2400" i="1">
-                        <a:latin typeface="Cambria Math" panose="02040503050406030204" pitchFamily="18" charset="0"/>
-                      </a:rPr>
-                      <m:t>𝑣</m:t>
-                    </m:r>
-                    <m:r>
-                      <a:rPr lang="en-US" altLang="ja-JP" sz="2400" b="0" i="0" smtClean="0">
-                        <a:latin typeface="Cambria Math" panose="02040503050406030204" pitchFamily="18" charset="0"/>
-                      </a:rPr>
-                      <m:t>)</m:t>
+                      <a:rPr lang="en-US" altLang="ja-JP" sz="2400" i="1" dirty="0" smtClean="0">
+                        <a:latin typeface="Cambria Math" panose="02040503050406030204" pitchFamily="18" charset="0"/>
+                      </a:rPr>
+                      <m:t>𝑟𝑎𝑑</m:t>
                     </m:r>
                   </m:oMath>
                 </a14:m>
+                <a:r>
+                  <a:rPr lang="ja-JP" altLang="en-US" sz="2400" dirty="0"/>
+                  <a:t>と書いてるだけです。</a:t>
+                </a:r>
                 <a:endParaRPr lang="en-US" altLang="ja-JP" sz="2400" dirty="0"/>
               </a:p>
               <a:p>
-                <a14:m>
-                  <m:oMath xmlns:m="http://schemas.openxmlformats.org/officeDocument/2006/math">
-                    <m:f>
-                      <m:fPr>
-                        <m:ctrlPr>
-                          <a:rPr lang="en-US" altLang="ja-JP" sz="2400" b="0" i="1" dirty="0" smtClean="0">
-                            <a:latin typeface="Cambria Math" panose="02040503050406030204" pitchFamily="18" charset="0"/>
-                          </a:rPr>
-                        </m:ctrlPr>
-                      </m:fPr>
-                      <m:num>
-                        <m:r>
-                          <m:rPr>
-                            <m:sty m:val="p"/>
-                          </m:rPr>
-                          <a:rPr lang="en-US" altLang="ja-JP" sz="2400" i="1" dirty="0">
-                            <a:latin typeface="Cambria Math" panose="02040503050406030204" pitchFamily="18" charset="0"/>
-                          </a:rPr>
-                          <m:t>θ</m:t>
-                        </m:r>
-                      </m:num>
-                      <m:den>
-                        <m:r>
-                          <a:rPr lang="en-US" altLang="ja-JP" sz="2400" b="0" i="1" dirty="0" smtClean="0">
-                            <a:latin typeface="Cambria Math" panose="02040503050406030204" pitchFamily="18" charset="0"/>
-                          </a:rPr>
-                          <m:t>𝑡</m:t>
-                        </m:r>
-                      </m:den>
-                    </m:f>
-                  </m:oMath>
-                </a14:m>
-                <a:r>
-                  <a:rPr lang="en-US" altLang="ja-JP" sz="2400" dirty="0"/>
-                  <a:t> </a:t>
-                </a:r>
                 <a:r>
                   <a:rPr lang="ja-JP" altLang="en-US" sz="2400" dirty="0"/>
-                  <a:t>は変位角を時間で割ったもの、つまり角速度である</a:t>
-                </a:r>
-                <a14:m>
-                  <m:oMath xmlns:m="http://schemas.openxmlformats.org/officeDocument/2006/math">
-                    <m:r>
-                      <a:rPr lang="en-US" altLang="ja-JP" sz="2400">
-                        <a:latin typeface="Cambria Math" panose="02040503050406030204" pitchFamily="18" charset="0"/>
-                      </a:rPr>
-                      <m:t>(</m:t>
-                    </m:r>
-                    <m:f>
-                      <m:fPr>
-                        <m:ctrlPr>
-                          <a:rPr lang="en-US" altLang="ja-JP" sz="2400" i="1" dirty="0">
-                            <a:latin typeface="Cambria Math" panose="02040503050406030204" pitchFamily="18" charset="0"/>
-                          </a:rPr>
-                        </m:ctrlPr>
-                      </m:fPr>
-                      <m:num>
-                        <m:r>
-                          <m:rPr>
-                            <m:sty m:val="p"/>
-                          </m:rPr>
-                          <a:rPr lang="en-US" altLang="ja-JP" sz="2400" i="1" dirty="0">
-                            <a:latin typeface="Cambria Math" panose="02040503050406030204" pitchFamily="18" charset="0"/>
-                          </a:rPr>
-                          <m:t>θ</m:t>
-                        </m:r>
-                      </m:num>
-                      <m:den>
-                        <m:r>
-                          <a:rPr lang="en-US" altLang="ja-JP" sz="2400" i="1" dirty="0">
-                            <a:latin typeface="Cambria Math" panose="02040503050406030204" pitchFamily="18" charset="0"/>
-                          </a:rPr>
-                          <m:t>𝑡</m:t>
-                        </m:r>
-                      </m:den>
-                    </m:f>
-                    <m:r>
-                      <a:rPr lang="en-US" altLang="ja-JP" sz="2400" b="0" i="1" dirty="0" smtClean="0">
-                        <a:latin typeface="Cambria Math" panose="02040503050406030204" pitchFamily="18" charset="0"/>
-                      </a:rPr>
-                      <m:t>=</m:t>
-                    </m:r>
-                    <m:r>
-                      <m:rPr>
-                        <m:sty m:val="p"/>
-                      </m:rPr>
-                      <a:rPr lang="en-US" altLang="ja-JP" sz="2400" i="1" smtClean="0">
-                        <a:latin typeface="Cambria Math" panose="02040503050406030204" pitchFamily="18" charset="0"/>
-                      </a:rPr>
-                      <m:t>ω</m:t>
-                    </m:r>
-                    <m:r>
-                      <a:rPr lang="en-US" altLang="ja-JP" sz="2400">
-                        <a:latin typeface="Cambria Math" panose="02040503050406030204" pitchFamily="18" charset="0"/>
-                      </a:rPr>
-                      <m:t>)</m:t>
-                    </m:r>
-                  </m:oMath>
-                </a14:m>
-                <a:endParaRPr lang="en-US" altLang="ja-JP" sz="2400" dirty="0"/>
-              </a:p>
-              <a:p>
-                <a:endParaRPr lang="en-US" altLang="ja-JP" sz="2400" dirty="0"/>
-              </a:p>
-              <a:p>
-                <a:r>
-                  <a:rPr lang="ja-JP" altLang="en-US" sz="2400" dirty="0"/>
-                  <a:t>瞬間速度と同様に、接線上の速度なので</a:t>
-                </a:r>
-                <a14:m>
-                  <m:oMath xmlns:m="http://schemas.openxmlformats.org/officeDocument/2006/math">
-                    <m:r>
-                      <a:rPr lang="en-US" altLang="ja-JP" sz="2400" i="1" dirty="0" smtClean="0">
-                        <a:latin typeface="Cambria Math" panose="02040503050406030204" pitchFamily="18" charset="0"/>
-                      </a:rPr>
-                      <m:t>𝑡</m:t>
-                    </m:r>
-                  </m:oMath>
-                </a14:m>
-                <a:r>
-                  <a:rPr lang="ja-JP" altLang="en-US" sz="2400" dirty="0"/>
-                  <a:t>は</a:t>
-                </a:r>
-                <a:r>
-                  <a:rPr lang="en-US" altLang="ja-JP" sz="2400" dirty="0"/>
-                  <a:t>0</a:t>
-                </a:r>
-                <a:r>
-                  <a:rPr lang="ja-JP" altLang="en-US" sz="2400" dirty="0"/>
-                  <a:t>に極限に近づけるため、</a:t>
-                </a:r>
-                <a:endParaRPr lang="en-US" altLang="ja-JP" sz="2400" dirty="0"/>
-              </a:p>
-              <a:p>
-                <a14:m>
-                  <m:oMath xmlns:m="http://schemas.openxmlformats.org/officeDocument/2006/math">
-                    <m:r>
-                      <a:rPr lang="en-US" altLang="ja-JP" sz="2400" b="0" i="1" dirty="0" smtClean="0">
-                        <a:latin typeface="Cambria Math" panose="02040503050406030204" pitchFamily="18" charset="0"/>
-                      </a:rPr>
-                      <m:t>𝑣</m:t>
-                    </m:r>
-                    <m:r>
-                      <a:rPr lang="en-US" altLang="ja-JP" sz="2400" b="0" i="1" baseline="-25000" dirty="0" smtClean="0">
-                        <a:latin typeface="Cambria Math" panose="02040503050406030204" pitchFamily="18" charset="0"/>
-                      </a:rPr>
-                      <m:t>𝑡</m:t>
-                    </m:r>
-                    <m:r>
-                      <a:rPr lang="en-US" altLang="ja-JP" sz="2400" b="0" i="1" dirty="0" smtClean="0">
-                        <a:latin typeface="Cambria Math" panose="02040503050406030204" pitchFamily="18" charset="0"/>
-                      </a:rPr>
-                      <m:t>=</m:t>
-                    </m:r>
-                    <m:r>
-                      <m:rPr>
-                        <m:sty m:val="p"/>
-                      </m:rPr>
-                      <a:rPr lang="en-US" altLang="ja-JP" sz="2400" i="1" dirty="0">
-                        <a:latin typeface="Cambria Math" panose="02040503050406030204" pitchFamily="18" charset="0"/>
-                      </a:rPr>
-                      <m:t>ω</m:t>
-                    </m:r>
-                    <m:r>
-                      <a:rPr lang="en-US" altLang="ja-JP" sz="2400" b="0" i="1" dirty="0" smtClean="0">
-                        <a:latin typeface="Cambria Math" panose="02040503050406030204" pitchFamily="18" charset="0"/>
-                      </a:rPr>
-                      <m:t>𝑟</m:t>
-                    </m:r>
-                  </m:oMath>
-                </a14:m>
-                <a:r>
-                  <a:rPr lang="en-US" altLang="ja-JP" sz="2400" dirty="0"/>
-                  <a:t> </a:t>
-                </a:r>
-                <a:r>
-                  <a:rPr lang="ja-JP" altLang="en-US" sz="2400" dirty="0"/>
-                  <a:t>となる</a:t>
-                </a:r>
-                <a:endParaRPr lang="en-US" altLang="ja-JP" sz="2400" dirty="0"/>
-              </a:p>
-              <a:p>
-                <a:r>
-                  <a:rPr lang="en-US" altLang="ja-JP" sz="2400" dirty="0"/>
-                  <a:t>※</a:t>
-                </a:r>
-                <a:r>
-                  <a:rPr lang="ja-JP" altLang="en-US" sz="2400" dirty="0"/>
-                  <a:t>興味がある方は時間微分について調べてみよう</a:t>
+                  <a:t>一般的にも使用されています。</a:t>
                 </a:r>
                 <a:endParaRPr lang="en-US" altLang="ja-JP" sz="2400" dirty="0"/>
               </a:p>
             </p:txBody>
           </p:sp>
         </mc:Choice>
-        <mc:Fallback xmlns="">
+        <mc:Fallback>
           <p:sp>
             <p:nvSpPr>
               <p:cNvPr id="6" name="テキスト ボックス 5">
@@ -9216,7 +9401,7 @@
             <p:spPr>
               <a:xfrm>
                 <a:off x="567542" y="1216429"/>
-                <a:ext cx="9718814" cy="5362943"/>
+                <a:ext cx="7290970" cy="4033476"/>
               </a:xfrm>
               <a:prstGeom prst="rect">
                 <a:avLst/>
@@ -9224,7 +9409,7 @@
               <a:blipFill>
                 <a:blip r:embed="rId2"/>
                 <a:stretch>
-                  <a:fillRect l="-941" t="-910" r="-63" b="-1706"/>
+                  <a:fillRect l="-1254" t="-1210" r="-334" b="-2572"/>
                 </a:stretch>
               </a:blipFill>
             </p:spPr>
@@ -9246,7 +9431,7 @@
     </p:spTree>
     <p:extLst>
       <p:ext uri="{BB962C8B-B14F-4D97-AF65-F5344CB8AC3E}">
-        <p14:creationId xmlns:p14="http://schemas.microsoft.com/office/powerpoint/2010/main" val="2149491964"/>
+        <p14:creationId xmlns:p14="http://schemas.microsoft.com/office/powerpoint/2010/main" val="1927322203"/>
       </p:ext>
     </p:extLst>
   </p:cSld>
